--- a/artifacts/active/Figure_supporting_workflows_native.pptx
+++ b/artifacts/active/Figure_supporting_workflows_native.pptx
@@ -4333,926 +4333,845 @@
       <p:grpSpPr>
         <a:xfrm xmlns:a="http://schemas.openxmlformats.org/drawingml/2006/main"/>
       </p:grpSpPr>
-      <p:sp>
-        <p:nvSpPr>
-          <p:cNvPr id="21" name="">
-            <a:extLst xmlns:a="http://schemas.openxmlformats.org/drawingml/2006/main">
-              <a:ext uri="{FF2B5EF4-FFF2-40B4-BE49-F238E27FC236}">
-                <a16:creationId xmlns:a16="http://schemas.microsoft.com/office/drawing/2014/main" id="{F0004500-C3B8-497D-A1D1-B32E4BB47361}"/>
-              </a:ext>
-            </a:extLst>
-          </p:cNvPr>
-          <p:cNvSpPr>
-            <a:spLocks xmlns:a="http://schemas.openxmlformats.org/drawingml/2006/main" noGrp="1"/>
-          </p:cNvSpPr>
-          <p:nvPr/>
-        </p:nvSpPr>
-        <p:spPr>
-          <a:xfrm xmlns:a="http://schemas.openxmlformats.org/drawingml/2006/main">
-            <a:off x="476250" y="228600"/>
-            <a:ext cx="11239500" cy="381000"/>
-          </a:xfrm>
-          <a:prstGeom xmlns:a="http://schemas.openxmlformats.org/drawingml/2006/main" prst="rect">
-            <a:avLst/>
-          </a:prstGeom>
-          <a:noFill xmlns:a="http://schemas.openxmlformats.org/drawingml/2006/main"/>
-          <a:ln xmlns:a="http://schemas.openxmlformats.org/drawingml/2006/main" w="0">
-            <a:noFill/>
-            <a:prstDash val="solid"/>
-          </a:ln>
-        </p:spPr>
-        <p:txBody>
-          <a:bodyPr xmlns:a="http://schemas.openxmlformats.org/drawingml/2006/main"/>
-          <a:lstStyle xmlns:a="http://schemas.openxmlformats.org/drawingml/2006/main"/>
-          <a:p xmlns:a="http://schemas.openxmlformats.org/drawingml/2006/main">
-            <a:pPr>
-              <a:defRPr sz="2400" b="1" i="0">
-                <a:solidFill>
-                  <a:srgbClr val="24324A"/>
-                </a:solidFill>
-                <a:latin typeface="Times New Roman"/>
-                <a:ea typeface="Times New Roman"/>
-                <a:cs typeface="Times New Roman"/>
-              </a:defRPr>
-            </a:pPr>
-            <a:r>
-              <a:rPr sz="2400" b="1" i="0">
-                <a:solidFill>
-                  <a:srgbClr val="24324A"/>
-                </a:solidFill>
-                <a:latin typeface="Times New Roman"/>
-                <a:ea typeface="Times New Roman"/>
-                <a:cs typeface="Times New Roman"/>
-              </a:rPr>
-              <a:t>Retrieval, augmentation, and review</a:t>
-            </a:r>
-          </a:p>
-        </p:txBody>
-      </p:sp>
-      <p:sp>
-        <p:nvSpPr>
-          <p:cNvPr id="2" name="">
-            <a:extLst xmlns:a="http://schemas.openxmlformats.org/drawingml/2006/main">
-              <a:ext uri="{FF2B5EF4-FFF2-40B4-BE49-F238E27FC236}">
-                <a16:creationId xmlns:a16="http://schemas.microsoft.com/office/drawing/2014/main" id="{8BF1E4AF-BD1D-43D2-97E1-CC1DB552FC5B}"/>
-              </a:ext>
-            </a:extLst>
-          </p:cNvPr>
-          <p:cNvSpPr>
-            <a:spLocks xmlns:a="http://schemas.openxmlformats.org/drawingml/2006/main" noGrp="1"/>
-          </p:cNvSpPr>
-          <p:nvPr/>
-        </p:nvSpPr>
-        <p:spPr>
-          <a:xfrm xmlns:a="http://schemas.openxmlformats.org/drawingml/2006/main">
-            <a:off x="476250" y="647700"/>
-            <a:ext cx="11239500" cy="238125"/>
-          </a:xfrm>
-          <a:prstGeom xmlns:a="http://schemas.openxmlformats.org/drawingml/2006/main" prst="rect">
-            <a:avLst/>
-          </a:prstGeom>
-          <a:noFill xmlns:a="http://schemas.openxmlformats.org/drawingml/2006/main"/>
-          <a:ln xmlns:a="http://schemas.openxmlformats.org/drawingml/2006/main" w="0">
-            <a:noFill/>
-            <a:prstDash val="solid"/>
-          </a:ln>
-        </p:spPr>
-        <p:txBody>
-          <a:bodyPr xmlns:a="http://schemas.openxmlformats.org/drawingml/2006/main"/>
-          <a:lstStyle xmlns:a="http://schemas.openxmlformats.org/drawingml/2006/main"/>
-          <a:p xmlns:a="http://schemas.openxmlformats.org/drawingml/2006/main">
-            <a:pPr>
-              <a:defRPr sz="1125" b="0" i="1">
-                <a:solidFill>
-                  <a:srgbClr val="687386"/>
-                </a:solidFill>
-                <a:latin typeface="Times New Roman"/>
-                <a:ea typeface="Times New Roman"/>
-                <a:cs typeface="Times New Roman"/>
-              </a:defRPr>
-            </a:pPr>
-            <a:r>
-              <a:rPr sz="1125" b="0" i="1">
-                <a:solidFill>
-                  <a:srgbClr val="687386"/>
-                </a:solidFill>
-                <a:latin typeface="Times New Roman"/>
-                <a:ea typeface="Times New Roman"/>
-                <a:cs typeface="Times New Roman"/>
-              </a:rPr>
-              <a:t>A task-specific synthesis loop couples candidate generation to fidelity and utility checks.</a:t>
-            </a:r>
-          </a:p>
-        </p:txBody>
-      </p:sp>
-      <p:sp>
-        <p:nvSpPr>
-          <p:cNvPr id="3" name="">
-            <a:extLst xmlns:a="http://schemas.openxmlformats.org/drawingml/2006/main">
-              <a:ext uri="{FF2B5EF4-FFF2-40B4-BE49-F238E27FC236}">
-                <a16:creationId xmlns:a16="http://schemas.microsoft.com/office/drawing/2014/main" id="{2FAD87D0-35AE-47D8-88F7-5438491743E6}"/>
-              </a:ext>
-            </a:extLst>
-          </p:cNvPr>
-          <p:cNvSpPr>
-            <a:spLocks xmlns:a="http://schemas.openxmlformats.org/drawingml/2006/main" noGrp="1"/>
-          </p:cNvSpPr>
-          <p:nvPr/>
-        </p:nvSpPr>
-        <p:spPr>
-          <a:xfrm xmlns:a="http://schemas.openxmlformats.org/drawingml/2006/main">
-            <a:off x="762000" y="2381250"/>
-            <a:ext cx="2190750" cy="1000125"/>
-          </a:xfrm>
-          <a:prstGeom xmlns:a="http://schemas.openxmlformats.org/drawingml/2006/main" prst="roundRect">
-            <a:avLst>
-              <a:gd name="adj" fmla="val 7619"/>
-            </a:avLst>
-          </a:prstGeom>
-          <a:solidFill xmlns:a="http://schemas.openxmlformats.org/drawingml/2006/main">
-            <a:srgbClr val="D9EEF0"/>
-          </a:solidFill>
-          <a:ln xmlns:a="http://schemas.openxmlformats.org/drawingml/2006/main" w="13335">
-            <a:solidFill>
-              <a:srgbClr val="438B86"/>
+      <p:grpSp>
+        <p:nvGrpSpPr>
+          <p:cNvPr id="35" name="group-remaining-components"/>
+          <p:cNvGrpSpPr/>
+          <p:nvPr/>
+        </p:nvGrpSpPr>
+        <p:grpSpPr>
+          <ns1:xfrm xmlns:ns1="http://schemas.openxmlformats.org/drawingml/2006/main">
+            <ns1:off x="0" y="0"/>
+            <ns1:ext cx="15240000" cy="8572500"/>
+            <ns1:chOff x="0" y="0"/>
+            <ns1:chExt cx="15240000" cy="8572500"/>
+          </ns1:xfrm>
+        </p:grpSpPr>
+        <p:sp>
+          <p:nvSpPr>
+            <p:cNvPr id="19" name="">
+              <a:extLst xmlns:a="http://schemas.openxmlformats.org/drawingml/2006/main">
+                <a:ext uri="{FF2B5EF4-FFF2-40B4-BE49-F238E27FC236}">
+                  <a16:creationId xmlns:a16="http://schemas.microsoft.com/office/drawing/2014/main" id="{B19D1328-A266-45F2-93ED-7FEE1A354B19}"/>
+                </a:ext>
+              </a:extLst>
+            </p:cNvPr>
+            <p:cNvSpPr>
+              <a:spLocks xmlns:a="http://schemas.openxmlformats.org/drawingml/2006/main"/>
+            </p:cNvSpPr>
+            <p:nvPr/>
+          </p:nvSpPr>
+          <p:spPr>
+            <a:xfrm xmlns:a="http://schemas.openxmlformats.org/drawingml/2006/main">
+              <a:off x="762000" y="2381250"/>
+              <a:ext cx="2190750" cy="1000125"/>
+            </a:xfrm>
+            <a:prstGeom xmlns:a="http://schemas.openxmlformats.org/drawingml/2006/main" prst="roundRect">
+              <a:avLst>
+                <a:gd name="adj" fmla="val 7619"/>
+              </a:avLst>
+            </a:prstGeom>
+            <a:solidFill xmlns:a="http://schemas.openxmlformats.org/drawingml/2006/main">
+              <a:srgbClr val="D9EEF0"/>
             </a:solidFill>
-            <a:prstDash val="solid"/>
-          </a:ln>
-        </p:spPr>
-      </p:sp>
-      <p:sp>
-        <p:nvSpPr>
-          <p:cNvPr id="4" name="">
-            <a:extLst xmlns:a="http://schemas.openxmlformats.org/drawingml/2006/main">
-              <a:ext uri="{FF2B5EF4-FFF2-40B4-BE49-F238E27FC236}">
-                <a16:creationId xmlns:a16="http://schemas.microsoft.com/office/drawing/2014/main" id="{DE31AE0A-8C7F-41A5-B918-5A389C45E9FE}"/>
-              </a:ext>
-            </a:extLst>
-          </p:cNvPr>
-          <p:cNvSpPr>
-            <a:spLocks xmlns:a="http://schemas.openxmlformats.org/drawingml/2006/main" noGrp="1"/>
-          </p:cNvSpPr>
-          <p:nvPr/>
-        </p:nvSpPr>
-        <p:spPr>
-          <a:xfrm xmlns:a="http://schemas.openxmlformats.org/drawingml/2006/main">
-            <a:off x="857250" y="2476500"/>
-            <a:ext cx="2000250" cy="266700"/>
-          </a:xfrm>
-          <a:prstGeom xmlns:a="http://schemas.openxmlformats.org/drawingml/2006/main" prst="rect">
-            <a:avLst/>
-          </a:prstGeom>
-          <a:noFill xmlns:a="http://schemas.openxmlformats.org/drawingml/2006/main"/>
-          <a:ln xmlns:a="http://schemas.openxmlformats.org/drawingml/2006/main" w="0">
-            <a:noFill/>
-            <a:prstDash val="solid"/>
-          </a:ln>
-        </p:spPr>
-        <p:txBody>
-          <a:bodyPr xmlns:a="http://schemas.openxmlformats.org/drawingml/2006/main"/>
-          <a:lstStyle xmlns:a="http://schemas.openxmlformats.org/drawingml/2006/main"/>
-          <a:p xmlns:a="http://schemas.openxmlformats.org/drawingml/2006/main">
-            <a:pPr>
-              <a:defRPr sz="1275" b="1" i="0">
-                <a:solidFill>
-                  <a:srgbClr val="438B86"/>
-                </a:solidFill>
-                <a:latin typeface="Times New Roman"/>
-                <a:ea typeface="Times New Roman"/>
-                <a:cs typeface="Times New Roman"/>
-              </a:defRPr>
-            </a:pPr>
-            <a:r>
-              <a:rPr sz="1275" b="1" i="0">
-                <a:solidFill>
-                  <a:srgbClr val="438B86"/>
-                </a:solidFill>
-                <a:latin typeface="Times New Roman"/>
-                <a:ea typeface="Times New Roman"/>
-                <a:cs typeface="Times New Roman"/>
-              </a:rPr>
-              <a:t>Retrieval agent</a:t>
-            </a:r>
-          </a:p>
-        </p:txBody>
-      </p:sp>
-      <p:sp>
-        <p:nvSpPr>
-          <p:cNvPr id="5" name="">
-            <a:extLst xmlns:a="http://schemas.openxmlformats.org/drawingml/2006/main">
-              <a:ext uri="{FF2B5EF4-FFF2-40B4-BE49-F238E27FC236}">
-                <a16:creationId xmlns:a16="http://schemas.microsoft.com/office/drawing/2014/main" id="{1D2664DE-66FD-430F-AEF1-EBA80EC5A2E7}"/>
-              </a:ext>
-            </a:extLst>
-          </p:cNvPr>
-          <p:cNvSpPr>
-            <a:spLocks xmlns:a="http://schemas.openxmlformats.org/drawingml/2006/main" noGrp="1"/>
-          </p:cNvSpPr>
-          <p:nvPr/>
-        </p:nvSpPr>
-        <p:spPr>
-          <a:xfrm xmlns:a="http://schemas.openxmlformats.org/drawingml/2006/main">
-            <a:off x="876300" y="2781300"/>
-            <a:ext cx="1962150" cy="523875"/>
-          </a:xfrm>
-          <a:prstGeom xmlns:a="http://schemas.openxmlformats.org/drawingml/2006/main" prst="rect">
-            <a:avLst/>
-          </a:prstGeom>
-          <a:noFill xmlns:a="http://schemas.openxmlformats.org/drawingml/2006/main"/>
-          <a:ln xmlns:a="http://schemas.openxmlformats.org/drawingml/2006/main" w="0">
-            <a:noFill/>
-            <a:prstDash val="solid"/>
-          </a:ln>
-        </p:spPr>
-        <p:txBody>
-          <a:bodyPr xmlns:a="http://schemas.openxmlformats.org/drawingml/2006/main"/>
-          <a:lstStyle xmlns:a="http://schemas.openxmlformats.org/drawingml/2006/main"/>
-          <a:p xmlns:a="http://schemas.openxmlformats.org/drawingml/2006/main">
-            <a:pPr>
-              <a:defRPr sz="900" b="0" i="0">
-                <a:solidFill>
-                  <a:srgbClr val="303A4B"/>
-                </a:solidFill>
-                <a:latin typeface="Times New Roman"/>
-                <a:ea typeface="Times New Roman"/>
-                <a:cs typeface="Times New Roman"/>
-              </a:defRPr>
-            </a:pPr>
-            <a:r>
-              <a:rPr sz="900" b="0" i="0">
-                <a:solidFill>
-                  <a:srgbClr val="303A4B"/>
-                </a:solidFill>
-                <a:latin typeface="Times New Roman"/>
-                <a:ea typeface="Times New Roman"/>
-                <a:cs typeface="Times New Roman"/>
-              </a:rPr>
-              <a:t>finds similar temporal samples</a:t>
-            </a:r>
-          </a:p>
-        </p:txBody>
-      </p:sp>
-      <p:sp>
-        <p:nvSpPr>
-          <p:cNvPr id="6" name="">
-            <a:extLst xmlns:a="http://schemas.openxmlformats.org/drawingml/2006/main">
-              <a:ext uri="{FF2B5EF4-FFF2-40B4-BE49-F238E27FC236}">
-                <a16:creationId xmlns:a16="http://schemas.microsoft.com/office/drawing/2014/main" id="{A3AB5FCE-7199-402F-A845-0CB117B511E5}"/>
-              </a:ext>
-            </a:extLst>
-          </p:cNvPr>
-          <p:cNvSpPr>
-            <a:spLocks xmlns:a="http://schemas.openxmlformats.org/drawingml/2006/main" noGrp="1"/>
-          </p:cNvSpPr>
-          <p:nvPr/>
-        </p:nvSpPr>
-        <p:spPr>
-          <a:xfrm xmlns:a="http://schemas.openxmlformats.org/drawingml/2006/main">
-            <a:off x="3857625" y="2381250"/>
-            <a:ext cx="2190750" cy="1000125"/>
-          </a:xfrm>
-          <a:prstGeom xmlns:a="http://schemas.openxmlformats.org/drawingml/2006/main" prst="roundRect">
-            <a:avLst>
-              <a:gd name="adj" fmla="val 7619"/>
-            </a:avLst>
-          </a:prstGeom>
-          <a:solidFill xmlns:a="http://schemas.openxmlformats.org/drawingml/2006/main">
-            <a:srgbClr val="DDEEDC"/>
-          </a:solidFill>
-          <a:ln xmlns:a="http://schemas.openxmlformats.org/drawingml/2006/main" w="13335">
-            <a:solidFill>
-              <a:srgbClr val="438B86"/>
+            <a:ln xmlns:a="http://schemas.openxmlformats.org/drawingml/2006/main" w="13335">
+              <a:solidFill>
+                <a:srgbClr val="438B86"/>
+              </a:solidFill>
+              <a:prstDash val="solid"/>
+            </a:ln>
+          </p:spPr>
+        </p:sp>
+        <p:sp>
+          <p:nvSpPr>
+            <p:cNvPr id="2" name="">
+              <a:extLst xmlns:a="http://schemas.openxmlformats.org/drawingml/2006/main">
+                <a:ext uri="{FF2B5EF4-FFF2-40B4-BE49-F238E27FC236}">
+                  <a16:creationId xmlns:a16="http://schemas.microsoft.com/office/drawing/2014/main" id="{ED41BC84-DEF8-4828-A22F-4A7D5674FC24}"/>
+                </a:ext>
+              </a:extLst>
+            </p:cNvPr>
+            <p:cNvSpPr>
+              <a:spLocks xmlns:a="http://schemas.openxmlformats.org/drawingml/2006/main"/>
+            </p:cNvSpPr>
+            <p:nvPr/>
+          </p:nvSpPr>
+          <p:spPr>
+            <a:xfrm xmlns:a="http://schemas.openxmlformats.org/drawingml/2006/main">
+              <a:off x="857250" y="2476500"/>
+              <a:ext cx="2000250" cy="266700"/>
+            </a:xfrm>
+            <a:prstGeom xmlns:a="http://schemas.openxmlformats.org/drawingml/2006/main" prst="rect">
+              <a:avLst/>
+            </a:prstGeom>
+            <a:noFill xmlns:a="http://schemas.openxmlformats.org/drawingml/2006/main"/>
+            <a:ln xmlns:a="http://schemas.openxmlformats.org/drawingml/2006/main" w="0">
+              <a:noFill/>
+              <a:prstDash val="solid"/>
+            </a:ln>
+          </p:spPr>
+          <p:txBody>
+            <a:bodyPr xmlns:a="http://schemas.openxmlformats.org/drawingml/2006/main"/>
+            <a:lstStyle xmlns:a="http://schemas.openxmlformats.org/drawingml/2006/main"/>
+            <a:p xmlns:a="http://schemas.openxmlformats.org/drawingml/2006/main">
+              <a:pPr>
+                <a:defRPr sz="1275" b="1" i="0">
+                  <a:solidFill>
+                    <a:srgbClr val="438B86"/>
+                  </a:solidFill>
+                  <a:latin typeface="Times New Roman"/>
+                  <a:ea typeface="Times New Roman"/>
+                  <a:cs typeface="Times New Roman"/>
+                </a:defRPr>
+              </a:pPr>
+              <a:r>
+                <a:rPr sz="1275" b="1" i="0">
+                  <a:solidFill>
+                    <a:srgbClr val="438B86"/>
+                  </a:solidFill>
+                  <a:latin typeface="Times New Roman"/>
+                  <a:ea typeface="Times New Roman"/>
+                  <a:cs typeface="Times New Roman"/>
+                </a:rPr>
+                <a:t>Retrieval agent</a:t>
+              </a:r>
+            </a:p>
+          </p:txBody>
+        </p:sp>
+        <p:sp>
+          <p:nvSpPr>
+            <p:cNvPr id="3" name="">
+              <a:extLst xmlns:a="http://schemas.openxmlformats.org/drawingml/2006/main">
+                <a:ext uri="{FF2B5EF4-FFF2-40B4-BE49-F238E27FC236}">
+                  <a16:creationId xmlns:a16="http://schemas.microsoft.com/office/drawing/2014/main" id="{DDC16A42-BE3B-43E0-B610-F48AC84091A1}"/>
+                </a:ext>
+              </a:extLst>
+            </p:cNvPr>
+            <p:cNvSpPr>
+              <a:spLocks xmlns:a="http://schemas.openxmlformats.org/drawingml/2006/main"/>
+            </p:cNvSpPr>
+            <p:nvPr/>
+          </p:nvSpPr>
+          <p:spPr>
+            <a:xfrm xmlns:a="http://schemas.openxmlformats.org/drawingml/2006/main">
+              <a:off x="876300" y="2781300"/>
+              <a:ext cx="1962150" cy="523875"/>
+            </a:xfrm>
+            <a:prstGeom xmlns:a="http://schemas.openxmlformats.org/drawingml/2006/main" prst="rect">
+              <a:avLst/>
+            </a:prstGeom>
+            <a:noFill xmlns:a="http://schemas.openxmlformats.org/drawingml/2006/main"/>
+            <a:ln xmlns:a="http://schemas.openxmlformats.org/drawingml/2006/main" w="0">
+              <a:noFill/>
+              <a:prstDash val="solid"/>
+            </a:ln>
+          </p:spPr>
+          <p:txBody>
+            <a:bodyPr xmlns:a="http://schemas.openxmlformats.org/drawingml/2006/main"/>
+            <a:lstStyle xmlns:a="http://schemas.openxmlformats.org/drawingml/2006/main"/>
+            <a:p xmlns:a="http://schemas.openxmlformats.org/drawingml/2006/main">
+              <a:pPr>
+                <a:defRPr sz="900" b="0" i="0">
+                  <a:solidFill>
+                    <a:srgbClr val="303A4B"/>
+                  </a:solidFill>
+                  <a:latin typeface="Times New Roman"/>
+                  <a:ea typeface="Times New Roman"/>
+                  <a:cs typeface="Times New Roman"/>
+                </a:defRPr>
+              </a:pPr>
+              <a:r>
+                <a:rPr sz="900" b="0" i="0">
+                  <a:solidFill>
+                    <a:srgbClr val="303A4B"/>
+                  </a:solidFill>
+                  <a:latin typeface="Times New Roman"/>
+                  <a:ea typeface="Times New Roman"/>
+                  <a:cs typeface="Times New Roman"/>
+                </a:rPr>
+                <a:t>finds similar temporal samples</a:t>
+              </a:r>
+            </a:p>
+          </p:txBody>
+        </p:sp>
+        <p:sp>
+          <p:nvSpPr>
+            <p:cNvPr id="4" name="">
+              <a:extLst xmlns:a="http://schemas.openxmlformats.org/drawingml/2006/main">
+                <a:ext uri="{FF2B5EF4-FFF2-40B4-BE49-F238E27FC236}">
+                  <a16:creationId xmlns:a16="http://schemas.microsoft.com/office/drawing/2014/main" id="{D2768537-3B1E-49A7-BC1D-FA34482B201E}"/>
+                </a:ext>
+              </a:extLst>
+            </p:cNvPr>
+            <p:cNvSpPr>
+              <a:spLocks xmlns:a="http://schemas.openxmlformats.org/drawingml/2006/main"/>
+            </p:cNvSpPr>
+            <p:nvPr/>
+          </p:nvSpPr>
+          <p:spPr>
+            <a:xfrm xmlns:a="http://schemas.openxmlformats.org/drawingml/2006/main">
+              <a:off x="3857625" y="2381250"/>
+              <a:ext cx="2190750" cy="1000125"/>
+            </a:xfrm>
+            <a:prstGeom xmlns:a="http://schemas.openxmlformats.org/drawingml/2006/main" prst="roundRect">
+              <a:avLst>
+                <a:gd name="adj" fmla="val 7619"/>
+              </a:avLst>
+            </a:prstGeom>
+            <a:solidFill xmlns:a="http://schemas.openxmlformats.org/drawingml/2006/main">
+              <a:srgbClr val="DDEEDC"/>
             </a:solidFill>
-            <a:prstDash val="solid"/>
-          </a:ln>
-        </p:spPr>
-      </p:sp>
-      <p:sp>
-        <p:nvSpPr>
-          <p:cNvPr id="7" name="">
-            <a:extLst xmlns:a="http://schemas.openxmlformats.org/drawingml/2006/main">
-              <a:ext uri="{FF2B5EF4-FFF2-40B4-BE49-F238E27FC236}">
-                <a16:creationId xmlns:a16="http://schemas.microsoft.com/office/drawing/2014/main" id="{22F97C9B-E5CB-4A63-997D-088E6D2B8052}"/>
-              </a:ext>
-            </a:extLst>
-          </p:cNvPr>
-          <p:cNvSpPr>
-            <a:spLocks xmlns:a="http://schemas.openxmlformats.org/drawingml/2006/main" noGrp="1"/>
-          </p:cNvSpPr>
-          <p:nvPr/>
-        </p:nvSpPr>
-        <p:spPr>
-          <a:xfrm xmlns:a="http://schemas.openxmlformats.org/drawingml/2006/main">
-            <a:off x="3952875" y="2476500"/>
-            <a:ext cx="2000250" cy="266700"/>
-          </a:xfrm>
-          <a:prstGeom xmlns:a="http://schemas.openxmlformats.org/drawingml/2006/main" prst="rect">
-            <a:avLst/>
-          </a:prstGeom>
-          <a:noFill xmlns:a="http://schemas.openxmlformats.org/drawingml/2006/main"/>
-          <a:ln xmlns:a="http://schemas.openxmlformats.org/drawingml/2006/main" w="0">
-            <a:noFill/>
-            <a:prstDash val="solid"/>
-          </a:ln>
-        </p:spPr>
-        <p:txBody>
-          <a:bodyPr xmlns:a="http://schemas.openxmlformats.org/drawingml/2006/main"/>
-          <a:lstStyle xmlns:a="http://schemas.openxmlformats.org/drawingml/2006/main"/>
-          <a:p xmlns:a="http://schemas.openxmlformats.org/drawingml/2006/main">
-            <a:pPr>
-              <a:defRPr sz="1275" b="1" i="0">
-                <a:solidFill>
-                  <a:srgbClr val="438B86"/>
-                </a:solidFill>
-                <a:latin typeface="Times New Roman"/>
-                <a:ea typeface="Times New Roman"/>
-                <a:cs typeface="Times New Roman"/>
-              </a:defRPr>
-            </a:pPr>
-            <a:r>
-              <a:rPr sz="1275" b="1" i="0">
-                <a:solidFill>
-                  <a:srgbClr val="438B86"/>
-                </a:solidFill>
-                <a:latin typeface="Times New Roman"/>
-                <a:ea typeface="Times New Roman"/>
-                <a:cs typeface="Times New Roman"/>
-              </a:rPr>
-              <a:t>Augmentation agent</a:t>
-            </a:r>
-          </a:p>
-        </p:txBody>
-      </p:sp>
-      <p:sp>
-        <p:nvSpPr>
-          <p:cNvPr id="8" name="">
-            <a:extLst xmlns:a="http://schemas.openxmlformats.org/drawingml/2006/main">
-              <a:ext uri="{FF2B5EF4-FFF2-40B4-BE49-F238E27FC236}">
-                <a16:creationId xmlns:a16="http://schemas.microsoft.com/office/drawing/2014/main" id="{17F6B243-C763-48E3-B6FD-E59DA9EE639B}"/>
-              </a:ext>
-            </a:extLst>
-          </p:cNvPr>
-          <p:cNvSpPr>
-            <a:spLocks xmlns:a="http://schemas.openxmlformats.org/drawingml/2006/main" noGrp="1"/>
-          </p:cNvSpPr>
-          <p:nvPr/>
-        </p:nvSpPr>
-        <p:spPr>
-          <a:xfrm xmlns:a="http://schemas.openxmlformats.org/drawingml/2006/main">
-            <a:off x="3971925" y="2781300"/>
-            <a:ext cx="1962150" cy="523875"/>
-          </a:xfrm>
-          <a:prstGeom xmlns:a="http://schemas.openxmlformats.org/drawingml/2006/main" prst="rect">
-            <a:avLst/>
-          </a:prstGeom>
-          <a:noFill xmlns:a="http://schemas.openxmlformats.org/drawingml/2006/main"/>
-          <a:ln xmlns:a="http://schemas.openxmlformats.org/drawingml/2006/main" w="0">
-            <a:noFill/>
-            <a:prstDash val="solid"/>
-          </a:ln>
-        </p:spPr>
-        <p:txBody>
-          <a:bodyPr xmlns:a="http://schemas.openxmlformats.org/drawingml/2006/main"/>
-          <a:lstStyle xmlns:a="http://schemas.openxmlformats.org/drawingml/2006/main"/>
-          <a:p xmlns:a="http://schemas.openxmlformats.org/drawingml/2006/main">
-            <a:pPr>
-              <a:defRPr sz="900" b="0" i="0">
-                <a:solidFill>
-                  <a:srgbClr val="303A4B"/>
-                </a:solidFill>
-                <a:latin typeface="Times New Roman"/>
-                <a:ea typeface="Times New Roman"/>
-                <a:cs typeface="Times New Roman"/>
-              </a:defRPr>
-            </a:pPr>
-            <a:r>
-              <a:rPr sz="900" b="0" i="0">
-                <a:solidFill>
-                  <a:srgbClr val="303A4B"/>
-                </a:solidFill>
-                <a:latin typeface="Times New Roman"/>
-                <a:ea typeface="Times New Roman"/>
-                <a:cs typeface="Times New Roman"/>
-              </a:rPr>
-              <a:t>generates a conditioned sample</a:t>
-            </a:r>
-          </a:p>
-        </p:txBody>
-      </p:sp>
-      <p:sp>
-        <p:nvSpPr>
-          <p:cNvPr id="9" name="">
-            <a:extLst xmlns:a="http://schemas.openxmlformats.org/drawingml/2006/main">
-              <a:ext uri="{FF2B5EF4-FFF2-40B4-BE49-F238E27FC236}">
-                <a16:creationId xmlns:a16="http://schemas.microsoft.com/office/drawing/2014/main" id="{F98CB867-9EEB-4868-A32F-680402268DD1}"/>
-              </a:ext>
-            </a:extLst>
-          </p:cNvPr>
-          <p:cNvSpPr>
-            <a:spLocks xmlns:a="http://schemas.openxmlformats.org/drawingml/2006/main" noGrp="1"/>
-          </p:cNvSpPr>
-          <p:nvPr/>
-        </p:nvSpPr>
-        <p:spPr>
-          <a:xfrm xmlns:a="http://schemas.openxmlformats.org/drawingml/2006/main">
-            <a:off x="6953250" y="2381250"/>
-            <a:ext cx="2190750" cy="1000125"/>
-          </a:xfrm>
-          <a:prstGeom xmlns:a="http://schemas.openxmlformats.org/drawingml/2006/main" prst="roundRect">
-            <a:avLst>
-              <a:gd name="adj" fmla="val 7619"/>
-            </a:avLst>
-          </a:prstGeom>
-          <a:solidFill xmlns:a="http://schemas.openxmlformats.org/drawingml/2006/main">
-            <a:srgbClr val="F4F0C9"/>
-          </a:solidFill>
-          <a:ln xmlns:a="http://schemas.openxmlformats.org/drawingml/2006/main" w="13335">
-            <a:solidFill>
-              <a:srgbClr val="B77F2B"/>
+            <a:ln xmlns:a="http://schemas.openxmlformats.org/drawingml/2006/main" w="13335">
+              <a:solidFill>
+                <a:srgbClr val="438B86"/>
+              </a:solidFill>
+              <a:prstDash val="solid"/>
+            </a:ln>
+          </p:spPr>
+        </p:sp>
+        <p:sp>
+          <p:nvSpPr>
+            <p:cNvPr id="5" name="">
+              <a:extLst xmlns:a="http://schemas.openxmlformats.org/drawingml/2006/main">
+                <a:ext uri="{FF2B5EF4-FFF2-40B4-BE49-F238E27FC236}">
+                  <a16:creationId xmlns:a16="http://schemas.microsoft.com/office/drawing/2014/main" id="{FEE4111A-FEFD-434F-BD85-C0AE413445B7}"/>
+                </a:ext>
+              </a:extLst>
+            </p:cNvPr>
+            <p:cNvSpPr>
+              <a:spLocks xmlns:a="http://schemas.openxmlformats.org/drawingml/2006/main"/>
+            </p:cNvSpPr>
+            <p:nvPr/>
+          </p:nvSpPr>
+          <p:spPr>
+            <a:xfrm xmlns:a="http://schemas.openxmlformats.org/drawingml/2006/main">
+              <a:off x="3952875" y="2476500"/>
+              <a:ext cx="2000250" cy="266700"/>
+            </a:xfrm>
+            <a:prstGeom xmlns:a="http://schemas.openxmlformats.org/drawingml/2006/main" prst="rect">
+              <a:avLst/>
+            </a:prstGeom>
+            <a:noFill xmlns:a="http://schemas.openxmlformats.org/drawingml/2006/main"/>
+            <a:ln xmlns:a="http://schemas.openxmlformats.org/drawingml/2006/main" w="0">
+              <a:noFill/>
+              <a:prstDash val="solid"/>
+            </a:ln>
+          </p:spPr>
+          <p:txBody>
+            <a:bodyPr xmlns:a="http://schemas.openxmlformats.org/drawingml/2006/main"/>
+            <a:lstStyle xmlns:a="http://schemas.openxmlformats.org/drawingml/2006/main"/>
+            <a:p xmlns:a="http://schemas.openxmlformats.org/drawingml/2006/main">
+              <a:pPr>
+                <a:defRPr sz="1275" b="1" i="0">
+                  <a:solidFill>
+                    <a:srgbClr val="438B86"/>
+                  </a:solidFill>
+                  <a:latin typeface="Times New Roman"/>
+                  <a:ea typeface="Times New Roman"/>
+                  <a:cs typeface="Times New Roman"/>
+                </a:defRPr>
+              </a:pPr>
+              <a:r>
+                <a:rPr sz="1275" b="1" i="0">
+                  <a:solidFill>
+                    <a:srgbClr val="438B86"/>
+                  </a:solidFill>
+                  <a:latin typeface="Times New Roman"/>
+                  <a:ea typeface="Times New Roman"/>
+                  <a:cs typeface="Times New Roman"/>
+                </a:rPr>
+                <a:t>Augmentation agent</a:t>
+              </a:r>
+            </a:p>
+          </p:txBody>
+        </p:sp>
+        <p:sp>
+          <p:nvSpPr>
+            <p:cNvPr id="6" name="">
+              <a:extLst xmlns:a="http://schemas.openxmlformats.org/drawingml/2006/main">
+                <a:ext uri="{FF2B5EF4-FFF2-40B4-BE49-F238E27FC236}">
+                  <a16:creationId xmlns:a16="http://schemas.microsoft.com/office/drawing/2014/main" id="{5A7BD6D4-F657-4221-905C-AD5D73B6641B}"/>
+                </a:ext>
+              </a:extLst>
+            </p:cNvPr>
+            <p:cNvSpPr>
+              <a:spLocks xmlns:a="http://schemas.openxmlformats.org/drawingml/2006/main"/>
+            </p:cNvSpPr>
+            <p:nvPr/>
+          </p:nvSpPr>
+          <p:spPr>
+            <a:xfrm xmlns:a="http://schemas.openxmlformats.org/drawingml/2006/main">
+              <a:off x="3971925" y="2781300"/>
+              <a:ext cx="1962150" cy="523875"/>
+            </a:xfrm>
+            <a:prstGeom xmlns:a="http://schemas.openxmlformats.org/drawingml/2006/main" prst="rect">
+              <a:avLst/>
+            </a:prstGeom>
+            <a:noFill xmlns:a="http://schemas.openxmlformats.org/drawingml/2006/main"/>
+            <a:ln xmlns:a="http://schemas.openxmlformats.org/drawingml/2006/main" w="0">
+              <a:noFill/>
+              <a:prstDash val="solid"/>
+            </a:ln>
+          </p:spPr>
+          <p:txBody>
+            <a:bodyPr xmlns:a="http://schemas.openxmlformats.org/drawingml/2006/main"/>
+            <a:lstStyle xmlns:a="http://schemas.openxmlformats.org/drawingml/2006/main"/>
+            <a:p xmlns:a="http://schemas.openxmlformats.org/drawingml/2006/main">
+              <a:pPr>
+                <a:defRPr sz="900" b="0" i="0">
+                  <a:solidFill>
+                    <a:srgbClr val="303A4B"/>
+                  </a:solidFill>
+                  <a:latin typeface="Times New Roman"/>
+                  <a:ea typeface="Times New Roman"/>
+                  <a:cs typeface="Times New Roman"/>
+                </a:defRPr>
+              </a:pPr>
+              <a:r>
+                <a:rPr sz="900" b="0" i="0">
+                  <a:solidFill>
+                    <a:srgbClr val="303A4B"/>
+                  </a:solidFill>
+                  <a:latin typeface="Times New Roman"/>
+                  <a:ea typeface="Times New Roman"/>
+                  <a:cs typeface="Times New Roman"/>
+                </a:rPr>
+                <a:t>selects suitable augmentation strategies</a:t>
+              </a:r>
+            </a:p>
+          </p:txBody>
+        </p:sp>
+        <p:sp>
+          <p:nvSpPr>
+            <p:cNvPr id="7" name="">
+              <a:extLst xmlns:a="http://schemas.openxmlformats.org/drawingml/2006/main">
+                <a:ext uri="{FF2B5EF4-FFF2-40B4-BE49-F238E27FC236}">
+                  <a16:creationId xmlns:a16="http://schemas.microsoft.com/office/drawing/2014/main" id="{BC35CF88-5244-4303-A02D-C0537BFBBE14}"/>
+                </a:ext>
+              </a:extLst>
+            </p:cNvPr>
+            <p:cNvSpPr>
+              <a:spLocks xmlns:a="http://schemas.openxmlformats.org/drawingml/2006/main"/>
+            </p:cNvSpPr>
+            <p:nvPr/>
+          </p:nvSpPr>
+          <p:spPr>
+            <a:xfrm xmlns:a="http://schemas.openxmlformats.org/drawingml/2006/main">
+              <a:off x="6953250" y="2381250"/>
+              <a:ext cx="2190750" cy="1000125"/>
+            </a:xfrm>
+            <a:prstGeom xmlns:a="http://schemas.openxmlformats.org/drawingml/2006/main" prst="roundRect">
+              <a:avLst>
+                <a:gd name="adj" fmla="val 7619"/>
+              </a:avLst>
+            </a:prstGeom>
+            <a:solidFill xmlns:a="http://schemas.openxmlformats.org/drawingml/2006/main">
+              <a:srgbClr val="F4F0C9"/>
             </a:solidFill>
-            <a:prstDash val="solid"/>
-          </a:ln>
-        </p:spPr>
-      </p:sp>
-      <p:sp>
-        <p:nvSpPr>
-          <p:cNvPr id="10" name="">
-            <a:extLst xmlns:a="http://schemas.openxmlformats.org/drawingml/2006/main">
-              <a:ext uri="{FF2B5EF4-FFF2-40B4-BE49-F238E27FC236}">
-                <a16:creationId xmlns:a16="http://schemas.microsoft.com/office/drawing/2014/main" id="{66431B8D-C0C3-47DA-86F0-6619366BC832}"/>
-              </a:ext>
-            </a:extLst>
-          </p:cNvPr>
-          <p:cNvSpPr>
-            <a:spLocks xmlns:a="http://schemas.openxmlformats.org/drawingml/2006/main" noGrp="1"/>
-          </p:cNvSpPr>
-          <p:nvPr/>
-        </p:nvSpPr>
-        <p:spPr>
-          <a:xfrm xmlns:a="http://schemas.openxmlformats.org/drawingml/2006/main">
-            <a:off x="7048500" y="2476500"/>
-            <a:ext cx="2000250" cy="266700"/>
-          </a:xfrm>
-          <a:prstGeom xmlns:a="http://schemas.openxmlformats.org/drawingml/2006/main" prst="rect">
-            <a:avLst/>
-          </a:prstGeom>
-          <a:noFill xmlns:a="http://schemas.openxmlformats.org/drawingml/2006/main"/>
-          <a:ln xmlns:a="http://schemas.openxmlformats.org/drawingml/2006/main" w="0">
-            <a:noFill/>
-            <a:prstDash val="solid"/>
-          </a:ln>
-        </p:spPr>
-        <p:txBody>
-          <a:bodyPr xmlns:a="http://schemas.openxmlformats.org/drawingml/2006/main"/>
-          <a:lstStyle xmlns:a="http://schemas.openxmlformats.org/drawingml/2006/main"/>
-          <a:p xmlns:a="http://schemas.openxmlformats.org/drawingml/2006/main">
-            <a:pPr>
-              <a:defRPr sz="1275" b="1" i="0">
-                <a:solidFill>
-                  <a:srgbClr val="B77F2B"/>
-                </a:solidFill>
-                <a:latin typeface="Times New Roman"/>
-                <a:ea typeface="Times New Roman"/>
-                <a:cs typeface="Times New Roman"/>
-              </a:defRPr>
-            </a:pPr>
-            <a:r>
-              <a:rPr sz="1275" b="1" i="0">
-                <a:solidFill>
-                  <a:srgbClr val="B77F2B"/>
-                </a:solidFill>
-                <a:latin typeface="Times New Roman"/>
-                <a:ea typeface="Times New Roman"/>
-                <a:cs typeface="Times New Roman"/>
-              </a:rPr>
-              <a:t>Review agent</a:t>
-            </a:r>
-          </a:p>
-        </p:txBody>
-      </p:sp>
-      <p:sp>
-        <p:nvSpPr>
-          <p:cNvPr id="11" name="">
-            <a:extLst xmlns:a="http://schemas.openxmlformats.org/drawingml/2006/main">
-              <a:ext uri="{FF2B5EF4-FFF2-40B4-BE49-F238E27FC236}">
-                <a16:creationId xmlns:a16="http://schemas.microsoft.com/office/drawing/2014/main" id="{45D8BB23-BE62-4CC2-9974-FD6975D8CB7A}"/>
-              </a:ext>
-            </a:extLst>
-          </p:cNvPr>
-          <p:cNvSpPr>
-            <a:spLocks xmlns:a="http://schemas.openxmlformats.org/drawingml/2006/main" noGrp="1"/>
-          </p:cNvSpPr>
-          <p:nvPr/>
-        </p:nvSpPr>
-        <p:spPr>
-          <a:xfrm xmlns:a="http://schemas.openxmlformats.org/drawingml/2006/main">
-            <a:off x="7067550" y="2781300"/>
-            <a:ext cx="1962150" cy="523875"/>
-          </a:xfrm>
-          <a:prstGeom xmlns:a="http://schemas.openxmlformats.org/drawingml/2006/main" prst="rect">
-            <a:avLst/>
-          </a:prstGeom>
-          <a:noFill xmlns:a="http://schemas.openxmlformats.org/drawingml/2006/main"/>
-          <a:ln xmlns:a="http://schemas.openxmlformats.org/drawingml/2006/main" w="0">
-            <a:noFill/>
-            <a:prstDash val="solid"/>
-          </a:ln>
-        </p:spPr>
-        <p:txBody>
-          <a:bodyPr xmlns:a="http://schemas.openxmlformats.org/drawingml/2006/main"/>
-          <a:lstStyle xmlns:a="http://schemas.openxmlformats.org/drawingml/2006/main"/>
-          <a:p xmlns:a="http://schemas.openxmlformats.org/drawingml/2006/main">
-            <a:pPr>
-              <a:defRPr sz="900" b="0" i="0">
-                <a:solidFill>
-                  <a:srgbClr val="303A4B"/>
-                </a:solidFill>
-                <a:latin typeface="Times New Roman"/>
-                <a:ea typeface="Times New Roman"/>
-                <a:cs typeface="Times New Roman"/>
-              </a:defRPr>
-            </a:pPr>
-            <a:r>
-              <a:rPr sz="900" b="0" i="0">
-                <a:solidFill>
-                  <a:srgbClr val="303A4B"/>
-                </a:solidFill>
-                <a:latin typeface="Times New Roman"/>
-                <a:ea typeface="Times New Roman"/>
-                <a:cs typeface="Times New Roman"/>
-              </a:rPr>
-              <a:t>checks fidelity and utility</a:t>
-            </a:r>
-          </a:p>
-        </p:txBody>
-      </p:sp>
-      <p:sp>
-        <p:nvSpPr>
-          <p:cNvPr id="12" name="">
-            <a:extLst xmlns:a="http://schemas.openxmlformats.org/drawingml/2006/main">
-              <a:ext uri="{FF2B5EF4-FFF2-40B4-BE49-F238E27FC236}">
-                <a16:creationId xmlns:a16="http://schemas.microsoft.com/office/drawing/2014/main" id="{32E9F4D4-F9EC-4BDA-982D-AE7477A5ACBF}"/>
-              </a:ext>
-            </a:extLst>
-          </p:cNvPr>
-          <p:cNvSpPr>
-            <a:spLocks xmlns:a="http://schemas.openxmlformats.org/drawingml/2006/main" noGrp="1"/>
-          </p:cNvSpPr>
-          <p:nvPr/>
-        </p:nvSpPr>
-        <p:spPr>
-          <a:xfrm xmlns:a="http://schemas.openxmlformats.org/drawingml/2006/main">
-            <a:off x="9667875" y="2381250"/>
-            <a:ext cx="1619250" cy="1000125"/>
-          </a:xfrm>
-          <a:prstGeom xmlns:a="http://schemas.openxmlformats.org/drawingml/2006/main" prst="roundRect">
-            <a:avLst>
-              <a:gd name="adj" fmla="val 7619"/>
-            </a:avLst>
-          </a:prstGeom>
-          <a:solidFill xmlns:a="http://schemas.openxmlformats.org/drawingml/2006/main">
-            <a:srgbClr val="E6E0F2"/>
-          </a:solidFill>
-          <a:ln xmlns:a="http://schemas.openxmlformats.org/drawingml/2006/main" w="13335">
-            <a:solidFill>
-              <a:srgbClr val="78639F"/>
+            <a:ln xmlns:a="http://schemas.openxmlformats.org/drawingml/2006/main" w="13335">
+              <a:solidFill>
+                <a:srgbClr val="B77F2B"/>
+              </a:solidFill>
+              <a:prstDash val="solid"/>
+            </a:ln>
+          </p:spPr>
+        </p:sp>
+        <p:sp>
+          <p:nvSpPr>
+            <p:cNvPr id="8" name="">
+              <a:extLst xmlns:a="http://schemas.openxmlformats.org/drawingml/2006/main">
+                <a:ext uri="{FF2B5EF4-FFF2-40B4-BE49-F238E27FC236}">
+                  <a16:creationId xmlns:a16="http://schemas.microsoft.com/office/drawing/2014/main" id="{E8FCF032-60EB-4BD6-99B7-DFACD49B5602}"/>
+                </a:ext>
+              </a:extLst>
+            </p:cNvPr>
+            <p:cNvSpPr>
+              <a:spLocks xmlns:a="http://schemas.openxmlformats.org/drawingml/2006/main"/>
+            </p:cNvSpPr>
+            <p:nvPr/>
+          </p:nvSpPr>
+          <p:spPr>
+            <a:xfrm xmlns:a="http://schemas.openxmlformats.org/drawingml/2006/main">
+              <a:off x="7048500" y="2476500"/>
+              <a:ext cx="2000250" cy="266700"/>
+            </a:xfrm>
+            <a:prstGeom xmlns:a="http://schemas.openxmlformats.org/drawingml/2006/main" prst="rect">
+              <a:avLst/>
+            </a:prstGeom>
+            <a:noFill xmlns:a="http://schemas.openxmlformats.org/drawingml/2006/main"/>
+            <a:ln xmlns:a="http://schemas.openxmlformats.org/drawingml/2006/main" w="0">
+              <a:noFill/>
+              <a:prstDash val="solid"/>
+            </a:ln>
+          </p:spPr>
+          <p:txBody>
+            <a:bodyPr xmlns:a="http://schemas.openxmlformats.org/drawingml/2006/main"/>
+            <a:lstStyle xmlns:a="http://schemas.openxmlformats.org/drawingml/2006/main"/>
+            <a:p xmlns:a="http://schemas.openxmlformats.org/drawingml/2006/main">
+              <a:pPr>
+                <a:defRPr sz="1275" b="1" i="0">
+                  <a:solidFill>
+                    <a:srgbClr val="B77F2B"/>
+                  </a:solidFill>
+                  <a:latin typeface="Times New Roman"/>
+                  <a:ea typeface="Times New Roman"/>
+                  <a:cs typeface="Times New Roman"/>
+                </a:defRPr>
+              </a:pPr>
+              <a:r>
+                <a:rPr sz="1275" b="1" i="0">
+                  <a:solidFill>
+                    <a:srgbClr val="B77F2B"/>
+                  </a:solidFill>
+                  <a:latin typeface="Times New Roman"/>
+                  <a:ea typeface="Times New Roman"/>
+                  <a:cs typeface="Times New Roman"/>
+                </a:rPr>
+                <a:t>Review agent</a:t>
+              </a:r>
+            </a:p>
+          </p:txBody>
+        </p:sp>
+        <p:sp>
+          <p:nvSpPr>
+            <p:cNvPr id="9" name="">
+              <a:extLst xmlns:a="http://schemas.openxmlformats.org/drawingml/2006/main">
+                <a:ext uri="{FF2B5EF4-FFF2-40B4-BE49-F238E27FC236}">
+                  <a16:creationId xmlns:a16="http://schemas.microsoft.com/office/drawing/2014/main" id="{F1894E27-57D3-47D8-A1DE-827A8DF1E901}"/>
+                </a:ext>
+              </a:extLst>
+            </p:cNvPr>
+            <p:cNvSpPr>
+              <a:spLocks xmlns:a="http://schemas.openxmlformats.org/drawingml/2006/main"/>
+            </p:cNvSpPr>
+            <p:nvPr/>
+          </p:nvSpPr>
+          <p:spPr>
+            <a:xfrm xmlns:a="http://schemas.openxmlformats.org/drawingml/2006/main">
+              <a:off x="7067550" y="2781300"/>
+              <a:ext cx="1962150" cy="523875"/>
+            </a:xfrm>
+            <a:prstGeom xmlns:a="http://schemas.openxmlformats.org/drawingml/2006/main" prst="rect">
+              <a:avLst/>
+            </a:prstGeom>
+            <a:noFill xmlns:a="http://schemas.openxmlformats.org/drawingml/2006/main"/>
+            <a:ln xmlns:a="http://schemas.openxmlformats.org/drawingml/2006/main" w="0">
+              <a:noFill/>
+              <a:prstDash val="solid"/>
+            </a:ln>
+          </p:spPr>
+          <p:txBody>
+            <a:bodyPr xmlns:a="http://schemas.openxmlformats.org/drawingml/2006/main"/>
+            <a:lstStyle xmlns:a="http://schemas.openxmlformats.org/drawingml/2006/main"/>
+            <a:p xmlns:a="http://schemas.openxmlformats.org/drawingml/2006/main">
+              <a:pPr>
+                <a:defRPr sz="900" b="0" i="0">
+                  <a:solidFill>
+                    <a:srgbClr val="303A4B"/>
+                  </a:solidFill>
+                  <a:latin typeface="Times New Roman"/>
+                  <a:ea typeface="Times New Roman"/>
+                  <a:cs typeface="Times New Roman"/>
+                </a:defRPr>
+              </a:pPr>
+              <a:r>
+                <a:rPr sz="900" b="0" i="0">
+                  <a:solidFill>
+                    <a:srgbClr val="303A4B"/>
+                  </a:solidFill>
+                  <a:latin typeface="Times New Roman"/>
+                  <a:ea typeface="Times New Roman"/>
+                  <a:cs typeface="Times New Roman"/>
+                </a:rPr>
+                <a:t>semantic quality of positive views</a:t>
+              </a:r>
+            </a:p>
+          </p:txBody>
+        </p:sp>
+        <p:sp>
+          <p:nvSpPr>
+            <p:cNvPr id="10" name="">
+              <a:extLst xmlns:a="http://schemas.openxmlformats.org/drawingml/2006/main">
+                <a:ext uri="{FF2B5EF4-FFF2-40B4-BE49-F238E27FC236}">
+                  <a16:creationId xmlns:a16="http://schemas.microsoft.com/office/drawing/2014/main" id="{B969227C-5486-4FB7-A652-50DF8F8FD605}"/>
+                </a:ext>
+              </a:extLst>
+            </p:cNvPr>
+            <p:cNvSpPr>
+              <a:spLocks xmlns:a="http://schemas.openxmlformats.org/drawingml/2006/main"/>
+            </p:cNvSpPr>
+            <p:nvPr/>
+          </p:nvSpPr>
+          <p:spPr>
+            <a:xfrm xmlns:a="http://schemas.openxmlformats.org/drawingml/2006/main">
+              <a:off x="9667875" y="2381250"/>
+              <a:ext cx="1619250" cy="1000125"/>
+            </a:xfrm>
+            <a:prstGeom xmlns:a="http://schemas.openxmlformats.org/drawingml/2006/main" prst="roundRect">
+              <a:avLst>
+                <a:gd name="adj" fmla="val 7619"/>
+              </a:avLst>
+            </a:prstGeom>
+            <a:solidFill xmlns:a="http://schemas.openxmlformats.org/drawingml/2006/main">
+              <a:srgbClr val="E6E0F2"/>
             </a:solidFill>
-            <a:prstDash val="solid"/>
-          </a:ln>
-        </p:spPr>
-      </p:sp>
-      <p:sp>
-        <p:nvSpPr>
-          <p:cNvPr id="13" name="">
-            <a:extLst xmlns:a="http://schemas.openxmlformats.org/drawingml/2006/main">
-              <a:ext uri="{FF2B5EF4-FFF2-40B4-BE49-F238E27FC236}">
-                <a16:creationId xmlns:a16="http://schemas.microsoft.com/office/drawing/2014/main" id="{CDEA864E-5470-43CA-BF29-A516B775849B}"/>
-              </a:ext>
-            </a:extLst>
-          </p:cNvPr>
-          <p:cNvSpPr>
-            <a:spLocks xmlns:a="http://schemas.openxmlformats.org/drawingml/2006/main" noGrp="1"/>
-          </p:cNvSpPr>
-          <p:nvPr/>
-        </p:nvSpPr>
-        <p:spPr>
-          <a:xfrm xmlns:a="http://schemas.openxmlformats.org/drawingml/2006/main">
-            <a:off x="9763125" y="2476500"/>
-            <a:ext cx="1428750" cy="266700"/>
-          </a:xfrm>
-          <a:prstGeom xmlns:a="http://schemas.openxmlformats.org/drawingml/2006/main" prst="rect">
-            <a:avLst/>
-          </a:prstGeom>
-          <a:noFill xmlns:a="http://schemas.openxmlformats.org/drawingml/2006/main"/>
-          <a:ln xmlns:a="http://schemas.openxmlformats.org/drawingml/2006/main" w="0">
-            <a:noFill/>
-            <a:prstDash val="solid"/>
-          </a:ln>
-        </p:spPr>
-        <p:txBody>
-          <a:bodyPr xmlns:a="http://schemas.openxmlformats.org/drawingml/2006/main"/>
-          <a:lstStyle xmlns:a="http://schemas.openxmlformats.org/drawingml/2006/main"/>
-          <a:p xmlns:a="http://schemas.openxmlformats.org/drawingml/2006/main">
-            <a:pPr>
-              <a:defRPr sz="1275" b="1" i="0">
-                <a:solidFill>
-                  <a:srgbClr val="78639F"/>
-                </a:solidFill>
-                <a:latin typeface="Times New Roman"/>
-                <a:ea typeface="Times New Roman"/>
-                <a:cs typeface="Times New Roman"/>
-              </a:defRPr>
-            </a:pPr>
-            <a:r>
-              <a:rPr sz="1275" b="1" i="0">
-                <a:solidFill>
-                  <a:srgbClr val="78639F"/>
-                </a:solidFill>
-                <a:latin typeface="Times New Roman"/>
-                <a:ea typeface="Times New Roman"/>
-                <a:cs typeface="Times New Roman"/>
-              </a:rPr>
-              <a:t>Accepted set</a:t>
-            </a:r>
-          </a:p>
-        </p:txBody>
-      </p:sp>
-      <p:sp>
-        <p:nvSpPr>
-          <p:cNvPr id="14" name="">
-            <a:extLst xmlns:a="http://schemas.openxmlformats.org/drawingml/2006/main">
-              <a:ext uri="{FF2B5EF4-FFF2-40B4-BE49-F238E27FC236}">
-                <a16:creationId xmlns:a16="http://schemas.microsoft.com/office/drawing/2014/main" id="{0BD3A53F-6E41-4E09-AEE9-B1DB856B22F9}"/>
-              </a:ext>
-            </a:extLst>
-          </p:cNvPr>
-          <p:cNvSpPr>
-            <a:spLocks xmlns:a="http://schemas.openxmlformats.org/drawingml/2006/main" noGrp="1"/>
-          </p:cNvSpPr>
-          <p:nvPr/>
-        </p:nvSpPr>
-        <p:spPr>
-          <a:xfrm xmlns:a="http://schemas.openxmlformats.org/drawingml/2006/main">
-            <a:off x="9782175" y="2781300"/>
-            <a:ext cx="1390650" cy="523875"/>
-          </a:xfrm>
-          <a:prstGeom xmlns:a="http://schemas.openxmlformats.org/drawingml/2006/main" prst="rect">
-            <a:avLst/>
-          </a:prstGeom>
-          <a:noFill xmlns:a="http://schemas.openxmlformats.org/drawingml/2006/main"/>
-          <a:ln xmlns:a="http://schemas.openxmlformats.org/drawingml/2006/main" w="0">
-            <a:noFill/>
-            <a:prstDash val="solid"/>
-          </a:ln>
-        </p:spPr>
-        <p:txBody>
-          <a:bodyPr xmlns:a="http://schemas.openxmlformats.org/drawingml/2006/main"/>
-          <a:lstStyle xmlns:a="http://schemas.openxmlformats.org/drawingml/2006/main"/>
-          <a:p xmlns:a="http://schemas.openxmlformats.org/drawingml/2006/main">
-            <a:pPr>
-              <a:defRPr sz="900" b="0" i="0">
-                <a:solidFill>
-                  <a:srgbClr val="303A4B"/>
-                </a:solidFill>
-                <a:latin typeface="Times New Roman"/>
-                <a:ea typeface="Times New Roman"/>
-                <a:cs typeface="Times New Roman"/>
-              </a:defRPr>
-            </a:pPr>
-            <a:r>
-              <a:rPr sz="900" b="0" i="0">
-                <a:solidFill>
-                  <a:srgbClr val="303A4B"/>
-                </a:solidFill>
-                <a:latin typeface="Times New Roman"/>
-                <a:ea typeface="Times New Roman"/>
-                <a:cs typeface="Times New Roman"/>
-              </a:rPr>
-              <a:t>keeps usable data</a:t>
-            </a:r>
-          </a:p>
-        </p:txBody>
-      </p:sp>
-      <p:cxnSp>
-        <p:nvCxnSpPr>
-          <p:cNvPr id="35" name=""/>
-          <p:cNvCxnSpPr>
-            <a:stCxn xmlns:a="http://schemas.openxmlformats.org/drawingml/2006/main" id="3" idx="3"/>
-            <a:endCxn xmlns:a="http://schemas.openxmlformats.org/drawingml/2006/main" id="6" idx="1"/>
-          </p:cNvCxnSpPr>
-          <p:nvPr/>
-        </p:nvCxnSpPr>
-        <p:spPr>
-          <a:xfrm xmlns:a="http://schemas.openxmlformats.org/drawingml/2006/main">
-            <a:off x="2952750" y="2881313"/>
-            <a:ext cx="904875" cy="0"/>
-          </a:xfrm>
-          <a:prstGeom xmlns:a="http://schemas.openxmlformats.org/drawingml/2006/main" prst="straightConnector1">
-            <a:avLst/>
-          </a:prstGeom>
-          <a:ln xmlns:a="http://schemas.openxmlformats.org/drawingml/2006/main" w="19050">
-            <a:solidFill>
-              <a:srgbClr val="438B86"/>
-            </a:solidFill>
-            <a:prstDash val="solid"/>
-            <a:headEnd type="arrow" w="sm" len="sm"/>
-          </a:ln>
-        </p:spPr>
-      </p:cxnSp>
-      <p:cxnSp>
-        <p:nvCxnSpPr>
-          <p:cNvPr id="36" name=""/>
-          <p:cNvCxnSpPr>
-            <a:stCxn xmlns:a="http://schemas.openxmlformats.org/drawingml/2006/main" id="6" idx="3"/>
-            <a:endCxn xmlns:a="http://schemas.openxmlformats.org/drawingml/2006/main" id="9" idx="1"/>
-          </p:cNvCxnSpPr>
-          <p:nvPr/>
-        </p:nvCxnSpPr>
-        <p:spPr>
-          <a:xfrm xmlns:a="http://schemas.openxmlformats.org/drawingml/2006/main">
-            <a:off x="6048375" y="2881313"/>
-            <a:ext cx="904875" cy="0"/>
-          </a:xfrm>
-          <a:prstGeom xmlns:a="http://schemas.openxmlformats.org/drawingml/2006/main" prst="straightConnector1">
-            <a:avLst/>
-          </a:prstGeom>
-          <a:ln xmlns:a="http://schemas.openxmlformats.org/drawingml/2006/main" w="19050">
-            <a:solidFill>
-              <a:srgbClr val="B77F2B"/>
-            </a:solidFill>
-            <a:prstDash val="solid"/>
-            <a:headEnd type="arrow" w="sm" len="sm"/>
-          </a:ln>
-        </p:spPr>
-      </p:cxnSp>
-      <p:cxnSp>
-        <p:nvCxnSpPr>
-          <p:cNvPr id="37" name=""/>
-          <p:cNvCxnSpPr>
-            <a:stCxn xmlns:a="http://schemas.openxmlformats.org/drawingml/2006/main" id="9" idx="3"/>
-            <a:endCxn xmlns:a="http://schemas.openxmlformats.org/drawingml/2006/main" id="12" idx="1"/>
-          </p:cNvCxnSpPr>
-          <p:nvPr/>
-        </p:nvCxnSpPr>
-        <p:spPr>
-          <a:xfrm xmlns:a="http://schemas.openxmlformats.org/drawingml/2006/main">
-            <a:off x="9144000" y="2881313"/>
-            <a:ext cx="523875" cy="0"/>
-          </a:xfrm>
-          <a:prstGeom xmlns:a="http://schemas.openxmlformats.org/drawingml/2006/main" prst="straightConnector1">
-            <a:avLst/>
-          </a:prstGeom>
-          <a:ln xmlns:a="http://schemas.openxmlformats.org/drawingml/2006/main" w="19050">
-            <a:solidFill>
-              <a:srgbClr val="78639F"/>
-            </a:solidFill>
-            <a:prstDash val="solid"/>
-            <a:headEnd type="arrow" w="sm" len="sm"/>
-          </a:ln>
-        </p:spPr>
-      </p:cxnSp>
-      <p:cxnSp>
-        <p:nvCxnSpPr>
-          <p:cNvPr id="38" name=""/>
-          <p:cNvCxnSpPr>
-            <a:stCxn xmlns:a="http://schemas.openxmlformats.org/drawingml/2006/main" id="9" idx="3"/>
-            <a:endCxn xmlns:a="http://schemas.openxmlformats.org/drawingml/2006/main" id="3" idx="1"/>
-          </p:cNvCxnSpPr>
-          <p:nvPr/>
-        </p:nvCxnSpPr>
-        <p:spPr>
-          <a:xfrm xmlns:a="http://schemas.openxmlformats.org/drawingml/2006/main" flipH="1">
-            <a:off x="762000" y="2881313"/>
-            <a:ext cx="8382000" cy="0"/>
-          </a:xfrm>
-          <a:prstGeom xmlns:a="http://schemas.openxmlformats.org/drawingml/2006/main" prst="straightConnector1">
-            <a:avLst/>
-          </a:prstGeom>
-          <a:ln xmlns:a="http://schemas.openxmlformats.org/drawingml/2006/main" w="19050">
-            <a:solidFill>
-              <a:srgbClr val="F3E2DE"/>
-            </a:solidFill>
-            <a:prstDash val="dash"/>
-            <a:headEnd type="arrow" w="sm" len="sm"/>
-          </a:ln>
-        </p:spPr>
-      </p:cxnSp>
-      <p:sp>
-        <p:nvSpPr>
-          <p:cNvPr id="19" name="">
-            <a:extLst xmlns:a="http://schemas.openxmlformats.org/drawingml/2006/main">
-              <a:ext uri="{FF2B5EF4-FFF2-40B4-BE49-F238E27FC236}">
-                <a16:creationId xmlns:a16="http://schemas.microsoft.com/office/drawing/2014/main" id="{A7F0EBBD-3BB2-4540-B084-2F3314C64CD4}"/>
-              </a:ext>
-            </a:extLst>
-          </p:cNvPr>
-          <p:cNvSpPr>
-            <a:spLocks xmlns:a="http://schemas.openxmlformats.org/drawingml/2006/main" noGrp="1"/>
-          </p:cNvSpPr>
-          <p:nvPr/>
-        </p:nvSpPr>
-        <p:spPr>
-          <a:xfrm xmlns:a="http://schemas.openxmlformats.org/drawingml/2006/main">
-            <a:off x="1619250" y="1524000"/>
-            <a:ext cx="8858250" cy="342900"/>
-          </a:xfrm>
-          <a:prstGeom xmlns:a="http://schemas.openxmlformats.org/drawingml/2006/main" prst="rect">
-            <a:avLst/>
-          </a:prstGeom>
-          <a:noFill xmlns:a="http://schemas.openxmlformats.org/drawingml/2006/main"/>
-          <a:ln xmlns:a="http://schemas.openxmlformats.org/drawingml/2006/main" w="0">
-            <a:noFill/>
-            <a:prstDash val="solid"/>
-          </a:ln>
-        </p:spPr>
-        <p:txBody>
-          <a:bodyPr xmlns:a="http://schemas.openxmlformats.org/drawingml/2006/main"/>
-          <a:lstStyle xmlns:a="http://schemas.openxmlformats.org/drawingml/2006/main"/>
-          <a:p xmlns:a="http://schemas.openxmlformats.org/drawingml/2006/main">
-            <a:pPr>
-              <a:defRPr sz="1425" b="1" i="0">
-                <a:solidFill>
-                  <a:srgbClr val="24324A"/>
-                </a:solidFill>
-                <a:latin typeface="Times New Roman"/>
-                <a:ea typeface="Times New Roman"/>
-                <a:cs typeface="Times New Roman"/>
-              </a:defRPr>
-            </a:pPr>
-            <a:r>
-              <a:rPr sz="1425" b="1" i="0">
-                <a:solidFill>
-                  <a:srgbClr val="24324A"/>
-                </a:solidFill>
-                <a:latin typeface="Times New Roman"/>
-                <a:ea typeface="Times New Roman"/>
-                <a:cs typeface="Times New Roman"/>
-              </a:rPr>
-              <a:t>retrieval  →  generation  →  review  →  downstream use</a:t>
-            </a:r>
-          </a:p>
-        </p:txBody>
-      </p:sp>
-      <p:sp>
-        <p:nvSpPr>
-          <p:cNvPr id="20" name="">
-            <a:extLst xmlns:a="http://schemas.openxmlformats.org/drawingml/2006/main">
-              <a:ext uri="{FF2B5EF4-FFF2-40B4-BE49-F238E27FC236}">
-                <a16:creationId xmlns:a16="http://schemas.microsoft.com/office/drawing/2014/main" id="{F4691BE5-7073-4BB8-A4EC-CB6F0A2D19C2}"/>
-              </a:ext>
-            </a:extLst>
-          </p:cNvPr>
-          <p:cNvSpPr>
-            <a:spLocks xmlns:a="http://schemas.openxmlformats.org/drawingml/2006/main" noGrp="1"/>
-          </p:cNvSpPr>
-          <p:nvPr/>
-        </p:nvSpPr>
-        <p:spPr>
-          <a:xfrm xmlns:a="http://schemas.openxmlformats.org/drawingml/2006/main">
-            <a:off x="904875" y="4000500"/>
-            <a:ext cx="10191750" cy="381000"/>
-          </a:xfrm>
-          <a:prstGeom xmlns:a="http://schemas.openxmlformats.org/drawingml/2006/main" prst="rect">
-            <a:avLst/>
-          </a:prstGeom>
-          <a:noFill xmlns:a="http://schemas.openxmlformats.org/drawingml/2006/main"/>
-          <a:ln xmlns:a="http://schemas.openxmlformats.org/drawingml/2006/main" w="0">
-            <a:noFill/>
-            <a:prstDash val="solid"/>
-          </a:ln>
-        </p:spPr>
-        <p:txBody>
-          <a:bodyPr xmlns:a="http://schemas.openxmlformats.org/drawingml/2006/main"/>
-          <a:lstStyle xmlns:a="http://schemas.openxmlformats.org/drawingml/2006/main"/>
-          <a:p xmlns:a="http://schemas.openxmlformats.org/drawingml/2006/main">
-            <a:pPr>
-              <a:defRPr sz="1050" b="0" i="1">
-                <a:solidFill>
-                  <a:srgbClr val="687386"/>
-                </a:solidFill>
-                <a:latin typeface="Times New Roman"/>
-                <a:ea typeface="Times New Roman"/>
-                <a:cs typeface="Times New Roman"/>
-              </a:defRPr>
-            </a:pPr>
-            <a:r>
-              <a:rPr sz="1050" b="0" i="1">
-                <a:solidFill>
-                  <a:srgbClr val="687386"/>
-                </a:solidFill>
-                <a:latin typeface="Times New Roman"/>
-                <a:ea typeface="Times New Roman"/>
-                <a:cs typeface="Times New Roman"/>
-              </a:rPr>
-              <a:t>Temporal fidelity: dependence, missingness, distribution  |  Utility: downstream task performance</a:t>
-            </a:r>
-          </a:p>
-        </p:txBody>
-      </p:sp>
+            <a:ln xmlns:a="http://schemas.openxmlformats.org/drawingml/2006/main" w="13335">
+              <a:solidFill>
+                <a:srgbClr val="78639F"/>
+              </a:solidFill>
+              <a:prstDash val="solid"/>
+            </a:ln>
+          </p:spPr>
+        </p:sp>
+        <p:sp>
+          <p:nvSpPr>
+            <p:cNvPr id="11" name="">
+              <a:extLst xmlns:a="http://schemas.openxmlformats.org/drawingml/2006/main">
+                <a:ext uri="{FF2B5EF4-FFF2-40B4-BE49-F238E27FC236}">
+                  <a16:creationId xmlns:a16="http://schemas.microsoft.com/office/drawing/2014/main" id="{5375CEE7-3CA5-483F-87ED-9834C7A049BC}"/>
+                </a:ext>
+              </a:extLst>
+            </p:cNvPr>
+            <p:cNvSpPr>
+              <a:spLocks xmlns:a="http://schemas.openxmlformats.org/drawingml/2006/main"/>
+            </p:cNvSpPr>
+            <p:nvPr/>
+          </p:nvSpPr>
+          <p:spPr>
+            <a:xfrm xmlns:a="http://schemas.openxmlformats.org/drawingml/2006/main">
+              <a:off x="9763125" y="2476500"/>
+              <a:ext cx="1428750" cy="266700"/>
+            </a:xfrm>
+            <a:prstGeom xmlns:a="http://schemas.openxmlformats.org/drawingml/2006/main" prst="rect">
+              <a:avLst/>
+            </a:prstGeom>
+            <a:noFill xmlns:a="http://schemas.openxmlformats.org/drawingml/2006/main"/>
+            <a:ln xmlns:a="http://schemas.openxmlformats.org/drawingml/2006/main" w="0">
+              <a:noFill/>
+              <a:prstDash val="solid"/>
+            </a:ln>
+          </p:spPr>
+          <p:txBody>
+            <a:bodyPr xmlns:a="http://schemas.openxmlformats.org/drawingml/2006/main"/>
+            <a:lstStyle xmlns:a="http://schemas.openxmlformats.org/drawingml/2006/main"/>
+            <a:p xmlns:a="http://schemas.openxmlformats.org/drawingml/2006/main">
+              <a:pPr>
+                <a:defRPr sz="1275" b="1" i="0">
+                  <a:solidFill>
+                    <a:srgbClr val="78639F"/>
+                  </a:solidFill>
+                  <a:latin typeface="Times New Roman"/>
+                  <a:ea typeface="Times New Roman"/>
+                  <a:cs typeface="Times New Roman"/>
+                </a:defRPr>
+              </a:pPr>
+              <a:r>
+                <a:rPr sz="1275" b="1" i="0">
+                  <a:solidFill>
+                    <a:srgbClr val="78639F"/>
+                  </a:solidFill>
+                  <a:latin typeface="Times New Roman"/>
+                  <a:ea typeface="Times New Roman"/>
+                  <a:cs typeface="Times New Roman"/>
+                </a:rPr>
+                <a:t>Accepted set</a:t>
+              </a:r>
+            </a:p>
+          </p:txBody>
+        </p:sp>
+        <p:sp>
+          <p:nvSpPr>
+            <p:cNvPr id="12" name="">
+              <a:extLst xmlns:a="http://schemas.openxmlformats.org/drawingml/2006/main">
+                <a:ext uri="{FF2B5EF4-FFF2-40B4-BE49-F238E27FC236}">
+                  <a16:creationId xmlns:a16="http://schemas.microsoft.com/office/drawing/2014/main" id="{B3B84A4A-B0CD-4F4F-AE42-F1B8BFE84F3F}"/>
+                </a:ext>
+              </a:extLst>
+            </p:cNvPr>
+            <p:cNvSpPr>
+              <a:spLocks xmlns:a="http://schemas.openxmlformats.org/drawingml/2006/main"/>
+            </p:cNvSpPr>
+            <p:nvPr/>
+          </p:nvSpPr>
+          <p:spPr>
+            <a:xfrm xmlns:a="http://schemas.openxmlformats.org/drawingml/2006/main">
+              <a:off x="9782175" y="2781300"/>
+              <a:ext cx="1390650" cy="523875"/>
+            </a:xfrm>
+            <a:prstGeom xmlns:a="http://schemas.openxmlformats.org/drawingml/2006/main" prst="rect">
+              <a:avLst/>
+            </a:prstGeom>
+            <a:noFill xmlns:a="http://schemas.openxmlformats.org/drawingml/2006/main"/>
+            <a:ln xmlns:a="http://schemas.openxmlformats.org/drawingml/2006/main" w="0">
+              <a:noFill/>
+              <a:prstDash val="solid"/>
+            </a:ln>
+          </p:spPr>
+          <p:txBody>
+            <a:bodyPr xmlns:a="http://schemas.openxmlformats.org/drawingml/2006/main"/>
+            <a:lstStyle xmlns:a="http://schemas.openxmlformats.org/drawingml/2006/main"/>
+            <a:p xmlns:a="http://schemas.openxmlformats.org/drawingml/2006/main">
+              <a:pPr>
+                <a:defRPr sz="900" b="0" i="0">
+                  <a:solidFill>
+                    <a:srgbClr val="303A4B"/>
+                  </a:solidFill>
+                  <a:latin typeface="Times New Roman"/>
+                  <a:ea typeface="Times New Roman"/>
+                  <a:cs typeface="Times New Roman"/>
+                </a:defRPr>
+              </a:pPr>
+              <a:r>
+                <a:rPr sz="900" b="0" i="0">
+                  <a:solidFill>
+                    <a:srgbClr val="303A4B"/>
+                  </a:solidFill>
+                  <a:latin typeface="Times New Roman"/>
+                  <a:ea typeface="Times New Roman"/>
+                  <a:cs typeface="Times New Roman"/>
+                </a:rPr>
+                <a:t>positive views for contrastive learning</a:t>
+              </a:r>
+            </a:p>
+          </p:txBody>
+        </p:sp>
+        <p:cxnSp>
+          <p:nvCxnSpPr>
+            <p:cNvPr id="31" name=""/>
+            <p:cNvCxnSpPr>
+              <a:stCxn xmlns:a="http://schemas.openxmlformats.org/drawingml/2006/main" id="1" idx="3"/>
+              <a:endCxn xmlns:a="http://schemas.openxmlformats.org/drawingml/2006/main" id="4" idx="1"/>
+            </p:cNvCxnSpPr>
+            <p:nvPr/>
+          </p:nvCxnSpPr>
+          <p:spPr>
+            <a:xfrm xmlns:a="http://schemas.openxmlformats.org/drawingml/2006/main">
+              <a:off x="2952750" y="2881313"/>
+              <a:ext cx="904875" cy="0"/>
+            </a:xfrm>
+            <a:prstGeom xmlns:a="http://schemas.openxmlformats.org/drawingml/2006/main" prst="straightConnector1">
+              <a:avLst/>
+            </a:prstGeom>
+            <a:ln xmlns:a="http://schemas.openxmlformats.org/drawingml/2006/main" w="19050">
+              <a:solidFill>
+                <a:srgbClr val="438B86"/>
+              </a:solidFill>
+              <a:prstDash val="solid"/>
+              <a:tailEnd type="arrow" w="sm" len="sm"/>
+            </a:ln>
+          </p:spPr>
+        </p:cxnSp>
+        <p:cxnSp>
+          <p:nvCxnSpPr>
+            <p:cNvPr id="32" name=""/>
+            <p:cNvCxnSpPr>
+              <a:stCxn xmlns:a="http://schemas.openxmlformats.org/drawingml/2006/main" id="4" idx="3"/>
+              <a:endCxn xmlns:a="http://schemas.openxmlformats.org/drawingml/2006/main" id="7" idx="1"/>
+            </p:cNvCxnSpPr>
+            <p:nvPr/>
+          </p:nvCxnSpPr>
+          <p:spPr>
+            <a:xfrm xmlns:a="http://schemas.openxmlformats.org/drawingml/2006/main">
+              <a:off x="6048375" y="2881313"/>
+              <a:ext cx="904875" cy="0"/>
+            </a:xfrm>
+            <a:prstGeom xmlns:a="http://schemas.openxmlformats.org/drawingml/2006/main" prst="straightConnector1">
+              <a:avLst/>
+            </a:prstGeom>
+            <a:ln xmlns:a="http://schemas.openxmlformats.org/drawingml/2006/main" w="19050">
+              <a:solidFill>
+                <a:srgbClr val="B77F2B"/>
+              </a:solidFill>
+              <a:prstDash val="solid"/>
+              <a:tailEnd type="arrow" w="sm" len="sm"/>
+            </a:ln>
+          </p:spPr>
+        </p:cxnSp>
+        <p:cxnSp>
+          <p:nvCxnSpPr>
+            <p:cNvPr id="33" name=""/>
+            <p:cNvCxnSpPr>
+              <a:stCxn xmlns:a="http://schemas.openxmlformats.org/drawingml/2006/main" id="7" idx="3"/>
+              <a:endCxn xmlns:a="http://schemas.openxmlformats.org/drawingml/2006/main" id="10" idx="1"/>
+            </p:cNvCxnSpPr>
+            <p:nvPr/>
+          </p:nvCxnSpPr>
+          <p:spPr>
+            <a:xfrm xmlns:a="http://schemas.openxmlformats.org/drawingml/2006/main">
+              <a:off x="9144000" y="2881313"/>
+              <a:ext cx="523875" cy="0"/>
+            </a:xfrm>
+            <a:prstGeom xmlns:a="http://schemas.openxmlformats.org/drawingml/2006/main" prst="straightConnector1">
+              <a:avLst/>
+            </a:prstGeom>
+            <a:ln xmlns:a="http://schemas.openxmlformats.org/drawingml/2006/main" w="19050">
+              <a:solidFill>
+                <a:srgbClr val="78639F"/>
+              </a:solidFill>
+              <a:prstDash val="solid"/>
+              <a:tailEnd type="arrow" w="sm" len="sm"/>
+            </a:ln>
+          </p:spPr>
+        </p:cxnSp>
+        <p:sp>
+          <p:nvSpPr>
+            <p:cNvPr id="34" name=""/>
+            <p:cNvSpPr/>
+            <p:nvPr/>
+          </p:nvSpPr>
+          <p:spPr>
+            <a:xfrm xmlns:a="http://schemas.openxmlformats.org/drawingml/2006/main">
+              <a:off x="1857375" y="3381375"/>
+              <a:ext cx="6191250" cy="571500"/>
+            </a:xfrm>
+            <ns0:custGeom xmlns:ns0="http://schemas.openxmlformats.org/drawingml/2006/main">
+              <ns0:avLst/>
+              <ns0:gdLst/>
+              <ns0:ahLst/>
+              <ns0:cxnLst/>
+              <ns0:pathLst>
+                <ns0:path w="6191250" h="571500" fill="none" stroke="1">
+                  <ns0:moveTo>
+                    <ns0:pt x="6191250" y="0"/>
+                  </ns0:moveTo>
+                  <ns0:lnTo>
+                    <ns0:pt x="6191250" y="571500"/>
+                  </ns0:lnTo>
+                  <ns0:lnTo>
+                    <ns0:pt x="0" y="571500"/>
+                  </ns0:lnTo>
+                  <ns0:lnTo>
+                    <ns0:pt x="0" y="0"/>
+                  </ns0:lnTo>
+                </ns0:path>
+              </ns0:pathLst>
+            </ns0:custGeom>
+            <a:ln xmlns:a="http://schemas.openxmlformats.org/drawingml/2006/main" w="19050">
+              <a:solidFill>
+                <a:srgbClr val="B77F2B"/>
+              </a:solidFill>
+              <a:prstDash val="dash"/>
+              <a:tailEnd type="arrow" w="sm" len="sm"/>
+            </a:ln>
+          </p:spPr>
+        </p:sp>
+        <p:sp>
+          <p:nvSpPr>
+            <p:cNvPr id="17" name="">
+              <a:extLst xmlns:a="http://schemas.openxmlformats.org/drawingml/2006/main">
+                <a:ext uri="{FF2B5EF4-FFF2-40B4-BE49-F238E27FC236}">
+                  <a16:creationId xmlns:a16="http://schemas.microsoft.com/office/drawing/2014/main" id="{06ED2271-112A-45C7-8FA8-C0D5F2D03EEB}"/>
+                </a:ext>
+              </a:extLst>
+            </p:cNvPr>
+            <p:cNvSpPr>
+              <a:spLocks xmlns:a="http://schemas.openxmlformats.org/drawingml/2006/main"/>
+            </p:cNvSpPr>
+            <p:nvPr/>
+          </p:nvSpPr>
+          <p:spPr>
+            <a:xfrm xmlns:a="http://schemas.openxmlformats.org/drawingml/2006/main">
+              <a:off x="1619250" y="1524000"/>
+              <a:ext cx="8858250" cy="342900"/>
+            </a:xfrm>
+            <a:prstGeom xmlns:a="http://schemas.openxmlformats.org/drawingml/2006/main" prst="rect">
+              <a:avLst/>
+            </a:prstGeom>
+            <a:noFill xmlns:a="http://schemas.openxmlformats.org/drawingml/2006/main"/>
+            <a:ln xmlns:a="http://schemas.openxmlformats.org/drawingml/2006/main" w="0">
+              <a:noFill/>
+              <a:prstDash val="solid"/>
+            </a:ln>
+          </p:spPr>
+          <p:txBody>
+            <a:bodyPr xmlns:a="http://schemas.openxmlformats.org/drawingml/2006/main"/>
+            <a:lstStyle xmlns:a="http://schemas.openxmlformats.org/drawingml/2006/main"/>
+            <a:p xmlns:a="http://schemas.openxmlformats.org/drawingml/2006/main">
+              <a:pPr>
+                <a:defRPr sz="1425" b="1" i="0">
+                  <a:solidFill>
+                    <a:srgbClr val="24324A"/>
+                  </a:solidFill>
+                  <a:latin typeface="Times New Roman"/>
+                  <a:ea typeface="Times New Roman"/>
+                  <a:cs typeface="Times New Roman"/>
+                </a:defRPr>
+              </a:pPr>
+              <a:r>
+                <a:rPr sz="1425" b="1" i="0">
+                  <a:solidFill>
+                    <a:srgbClr val="24324A"/>
+                  </a:solidFill>
+                  <a:latin typeface="Times New Roman"/>
+                  <a:ea typeface="Times New Roman"/>
+                  <a:cs typeface="Times New Roman"/>
+                </a:rPr>
+                <a:t/>
+              </a:r>
+            </a:p>
+          </p:txBody>
+        </p:sp>
+        <p:sp>
+          <p:nvSpPr>
+            <p:cNvPr id="18" name="">
+              <a:extLst xmlns:a="http://schemas.openxmlformats.org/drawingml/2006/main">
+                <a:ext uri="{FF2B5EF4-FFF2-40B4-BE49-F238E27FC236}">
+                  <a16:creationId xmlns:a16="http://schemas.microsoft.com/office/drawing/2014/main" id="{221246F0-B37A-4182-B1B1-2F9503A17536}"/>
+                </a:ext>
+              </a:extLst>
+            </p:cNvPr>
+            <p:cNvSpPr>
+              <a:spLocks xmlns:a="http://schemas.openxmlformats.org/drawingml/2006/main"/>
+            </p:cNvSpPr>
+            <p:nvPr/>
+          </p:nvSpPr>
+          <p:spPr>
+            <a:xfrm xmlns:a="http://schemas.openxmlformats.org/drawingml/2006/main">
+              <a:off x="904875" y="4000500"/>
+              <a:ext cx="10191750" cy="381000"/>
+            </a:xfrm>
+            <a:prstGeom xmlns:a="http://schemas.openxmlformats.org/drawingml/2006/main" prst="rect">
+              <a:avLst/>
+            </a:prstGeom>
+            <a:noFill xmlns:a="http://schemas.openxmlformats.org/drawingml/2006/main"/>
+            <a:ln xmlns:a="http://schemas.openxmlformats.org/drawingml/2006/main" w="0">
+              <a:noFill/>
+              <a:prstDash val="solid"/>
+            </a:ln>
+          </p:spPr>
+          <p:txBody>
+            <a:bodyPr xmlns:a="http://schemas.openxmlformats.org/drawingml/2006/main"/>
+            <a:lstStyle xmlns:a="http://schemas.openxmlformats.org/drawingml/2006/main"/>
+            <a:p xmlns:a="http://schemas.openxmlformats.org/drawingml/2006/main">
+              <a:pPr>
+                <a:defRPr sz="1050" b="0" i="1">
+                  <a:solidFill>
+                    <a:srgbClr val="687386"/>
+                  </a:solidFill>
+                  <a:latin typeface="Times New Roman"/>
+                  <a:ea typeface="Times New Roman"/>
+                  <a:cs typeface="Times New Roman"/>
+                </a:defRPr>
+              </a:pPr>
+              <a:r>
+                <a:rPr sz="1050" b="0" i="1">
+                  <a:solidFill>
+                    <a:srgbClr val="687386"/>
+                  </a:solidFill>
+                  <a:latin typeface="Times New Roman"/>
+                  <a:ea typeface="Times New Roman"/>
+                  <a:cs typeface="Times New Roman"/>
+                </a:rPr>
+                <a:t/>
+              </a:r>
+            </a:p>
+          </p:txBody>
+        </p:sp>
+      </p:grpSp>
     </p:spTree>
     <p:extLst>
       <p:ext uri="{BB962C8B-B14F-4D97-AF65-F5344CB8AC3E}">
-        <p14:creationId xmlns:p14="http://schemas.microsoft.com/office/powerpoint/2010/main" val="1948270866"/>
+        <p14:creationId xmlns:p14="http://schemas.microsoft.com/office/powerpoint/2010/main" val="1917170435"/>
       </p:ext>
     </p:extLst>
   </p:cSld>
@@ -5278,970 +5197,873 @@
       <p:grpSpPr>
         <a:xfrm xmlns:a="http://schemas.openxmlformats.org/drawingml/2006/main"/>
       </p:grpSpPr>
-      <p:sp>
-        <p:nvSpPr>
-          <p:cNvPr id="22" name="">
-            <a:extLst xmlns:a="http://schemas.openxmlformats.org/drawingml/2006/main">
-              <a:ext uri="{FF2B5EF4-FFF2-40B4-BE49-F238E27FC236}">
-                <a16:creationId xmlns:a16="http://schemas.microsoft.com/office/drawing/2014/main" id="{0C9D3564-270E-4AB5-92F7-70D570EC65E6}"/>
-              </a:ext>
-            </a:extLst>
-          </p:cNvPr>
-          <p:cNvSpPr>
-            <a:spLocks xmlns:a="http://schemas.openxmlformats.org/drawingml/2006/main" noGrp="1"/>
-          </p:cNvSpPr>
-          <p:nvPr/>
-        </p:nvSpPr>
-        <p:spPr>
-          <a:xfrm xmlns:a="http://schemas.openxmlformats.org/drawingml/2006/main">
-            <a:off x="476250" y="228600"/>
-            <a:ext cx="11239500" cy="381000"/>
-          </a:xfrm>
-          <a:prstGeom xmlns:a="http://schemas.openxmlformats.org/drawingml/2006/main" prst="rect">
-            <a:avLst/>
-          </a:prstGeom>
-          <a:noFill xmlns:a="http://schemas.openxmlformats.org/drawingml/2006/main"/>
-          <a:ln xmlns:a="http://schemas.openxmlformats.org/drawingml/2006/main" w="0">
-            <a:noFill/>
-            <a:prstDash val="solid"/>
-          </a:ln>
-        </p:spPr>
-        <p:txBody>
-          <a:bodyPr xmlns:a="http://schemas.openxmlformats.org/drawingml/2006/main"/>
-          <a:lstStyle xmlns:a="http://schemas.openxmlformats.org/drawingml/2006/main"/>
-          <a:p xmlns:a="http://schemas.openxmlformats.org/drawingml/2006/main">
-            <a:pPr>
-              <a:defRPr sz="2400" b="1" i="0">
-                <a:solidFill>
-                  <a:srgbClr val="24324A"/>
-                </a:solidFill>
-                <a:latin typeface="Times New Roman"/>
-                <a:ea typeface="Times New Roman"/>
-                <a:cs typeface="Times New Roman"/>
-              </a:defRPr>
-            </a:pPr>
-            <a:r>
-              <a:rPr sz="2400" b="1" i="0">
-                <a:solidFill>
-                  <a:srgbClr val="24324A"/>
-                </a:solidFill>
-                <a:latin typeface="Times New Roman"/>
-                <a:ea typeface="Times New Roman"/>
-                <a:cs typeface="Times New Roman"/>
-              </a:rPr>
-              <a:t>Coarse-to-fine anomaly diagnosis</a:t>
-            </a:r>
-          </a:p>
-        </p:txBody>
-      </p:sp>
-      <p:sp>
-        <p:nvSpPr>
-          <p:cNvPr id="2" name="">
-            <a:extLst xmlns:a="http://schemas.openxmlformats.org/drawingml/2006/main">
-              <a:ext uri="{FF2B5EF4-FFF2-40B4-BE49-F238E27FC236}">
-                <a16:creationId xmlns:a16="http://schemas.microsoft.com/office/drawing/2014/main" id="{60C9A613-C954-4126-99DA-F00F97211D88}"/>
-              </a:ext>
-            </a:extLst>
-          </p:cNvPr>
-          <p:cNvSpPr>
-            <a:spLocks xmlns:a="http://schemas.openxmlformats.org/drawingml/2006/main" noGrp="1"/>
-          </p:cNvSpPr>
-          <p:nvPr/>
-        </p:nvSpPr>
-        <p:spPr>
-          <a:xfrm xmlns:a="http://schemas.openxmlformats.org/drawingml/2006/main">
-            <a:off x="476250" y="647700"/>
-            <a:ext cx="11239500" cy="238125"/>
-          </a:xfrm>
-          <a:prstGeom xmlns:a="http://schemas.openxmlformats.org/drawingml/2006/main" prst="rect">
-            <a:avLst/>
-          </a:prstGeom>
-          <a:noFill xmlns:a="http://schemas.openxmlformats.org/drawingml/2006/main"/>
-          <a:ln xmlns:a="http://schemas.openxmlformats.org/drawingml/2006/main" w="0">
-            <a:noFill/>
-            <a:prstDash val="solid"/>
-          </a:ln>
-        </p:spPr>
-        <p:txBody>
-          <a:bodyPr xmlns:a="http://schemas.openxmlformats.org/drawingml/2006/main"/>
-          <a:lstStyle xmlns:a="http://schemas.openxmlformats.org/drawingml/2006/main"/>
-          <a:p xmlns:a="http://schemas.openxmlformats.org/drawingml/2006/main">
-            <a:pPr>
-              <a:defRPr sz="1125" b="0" i="1">
-                <a:solidFill>
-                  <a:srgbClr val="687386"/>
-                </a:solidFill>
-                <a:latin typeface="Times New Roman"/>
-                <a:ea typeface="Times New Roman"/>
-                <a:cs typeface="Times New Roman"/>
-              </a:defRPr>
-            </a:pPr>
-            <a:r>
-              <a:rPr sz="1125" b="0" i="1">
-                <a:solidFill>
-                  <a:srgbClr val="687386"/>
-                </a:solidFill>
-                <a:latin typeface="Times New Roman"/>
-                <a:ea typeface="Times New Roman"/>
-                <a:cs typeface="Times New Roman"/>
-              </a:rPr>
-              <a:t>Evidence acquisition and iterative refinement connect detection to a diagnosis and a final alert.</a:t>
-            </a:r>
-          </a:p>
-        </p:txBody>
-      </p:sp>
-      <p:sp>
-        <p:nvSpPr>
-          <p:cNvPr id="3" name="">
-            <a:extLst xmlns:a="http://schemas.openxmlformats.org/drawingml/2006/main">
-              <a:ext uri="{FF2B5EF4-FFF2-40B4-BE49-F238E27FC236}">
-                <a16:creationId xmlns:a16="http://schemas.microsoft.com/office/drawing/2014/main" id="{822224C6-F3DE-44B6-91D0-DD3208164D92}"/>
-              </a:ext>
-            </a:extLst>
-          </p:cNvPr>
-          <p:cNvSpPr>
-            <a:spLocks xmlns:a="http://schemas.openxmlformats.org/drawingml/2006/main" noGrp="1"/>
-          </p:cNvSpPr>
-          <p:nvPr/>
-        </p:nvSpPr>
-        <p:spPr>
-          <a:xfrm xmlns:a="http://schemas.openxmlformats.org/drawingml/2006/main">
-            <a:off x="571500" y="2476500"/>
-            <a:ext cx="2286000" cy="1095375"/>
-          </a:xfrm>
-          <a:prstGeom xmlns:a="http://schemas.openxmlformats.org/drawingml/2006/main" prst="roundRect">
-            <a:avLst>
-              <a:gd name="adj" fmla="val 6957"/>
-            </a:avLst>
-          </a:prstGeom>
-          <a:solidFill xmlns:a="http://schemas.openxmlformats.org/drawingml/2006/main">
-            <a:srgbClr val="D9EEF0"/>
-          </a:solidFill>
-          <a:ln xmlns:a="http://schemas.openxmlformats.org/drawingml/2006/main" w="13335">
-            <a:solidFill>
-              <a:srgbClr val="438B86"/>
+      <p:grpSp>
+        <p:nvGrpSpPr>
+          <p:cNvPr id="35" name="group-remaining-components"/>
+          <p:cNvGrpSpPr/>
+          <p:nvPr/>
+        </p:nvGrpSpPr>
+        <p:grpSpPr>
+          <ns1:xfrm xmlns:ns1="http://schemas.openxmlformats.org/drawingml/2006/main">
+            <ns1:off x="0" y="0"/>
+            <ns1:ext cx="15240000" cy="8572500"/>
+            <ns1:chOff x="0" y="0"/>
+            <ns1:chExt cx="15240000" cy="8572500"/>
+          </ns1:xfrm>
+        </p:grpSpPr>
+        <p:sp>
+          <p:nvSpPr>
+            <p:cNvPr id="20" name="">
+              <a:extLst xmlns:a="http://schemas.openxmlformats.org/drawingml/2006/main">
+                <a:ext uri="{FF2B5EF4-FFF2-40B4-BE49-F238E27FC236}">
+                  <a16:creationId xmlns:a16="http://schemas.microsoft.com/office/drawing/2014/main" id="{FEF69D22-4DA9-4F85-A9F5-CA4B993EE732}"/>
+                </a:ext>
+              </a:extLst>
+            </p:cNvPr>
+            <p:cNvSpPr>
+              <a:spLocks xmlns:a="http://schemas.openxmlformats.org/drawingml/2006/main"/>
+            </p:cNvSpPr>
+            <p:nvPr/>
+          </p:nvSpPr>
+          <p:spPr>
+            <a:xfrm xmlns:a="http://schemas.openxmlformats.org/drawingml/2006/main">
+              <a:off x="571500" y="2476500"/>
+              <a:ext cx="2286000" cy="1095375"/>
+            </a:xfrm>
+            <a:prstGeom xmlns:a="http://schemas.openxmlformats.org/drawingml/2006/main" prst="roundRect">
+              <a:avLst>
+                <a:gd name="adj" fmla="val 6957"/>
+              </a:avLst>
+            </a:prstGeom>
+            <a:solidFill xmlns:a="http://schemas.openxmlformats.org/drawingml/2006/main">
+              <a:srgbClr val="D9EEF0"/>
             </a:solidFill>
-            <a:prstDash val="solid"/>
-          </a:ln>
-        </p:spPr>
-      </p:sp>
-      <p:sp>
-        <p:nvSpPr>
-          <p:cNvPr id="4" name="">
-            <a:extLst xmlns:a="http://schemas.openxmlformats.org/drawingml/2006/main">
-              <a:ext uri="{FF2B5EF4-FFF2-40B4-BE49-F238E27FC236}">
-                <a16:creationId xmlns:a16="http://schemas.microsoft.com/office/drawing/2014/main" id="{8C80698B-985B-4CFD-BD23-53B864C4E055}"/>
-              </a:ext>
-            </a:extLst>
-          </p:cNvPr>
-          <p:cNvSpPr>
-            <a:spLocks xmlns:a="http://schemas.openxmlformats.org/drawingml/2006/main" noGrp="1"/>
-          </p:cNvSpPr>
-          <p:nvPr/>
-        </p:nvSpPr>
-        <p:spPr>
-          <a:xfrm xmlns:a="http://schemas.openxmlformats.org/drawingml/2006/main">
-            <a:off x="666750" y="2571750"/>
-            <a:ext cx="2095500" cy="266700"/>
-          </a:xfrm>
-          <a:prstGeom xmlns:a="http://schemas.openxmlformats.org/drawingml/2006/main" prst="rect">
-            <a:avLst/>
-          </a:prstGeom>
-          <a:noFill xmlns:a="http://schemas.openxmlformats.org/drawingml/2006/main"/>
-          <a:ln xmlns:a="http://schemas.openxmlformats.org/drawingml/2006/main" w="0">
-            <a:noFill/>
-            <a:prstDash val="solid"/>
-          </a:ln>
-        </p:spPr>
-        <p:txBody>
-          <a:bodyPr xmlns:a="http://schemas.openxmlformats.org/drawingml/2006/main"/>
-          <a:lstStyle xmlns:a="http://schemas.openxmlformats.org/drawingml/2006/main"/>
-          <a:p xmlns:a="http://schemas.openxmlformats.org/drawingml/2006/main">
-            <a:pPr>
-              <a:defRPr sz="1275" b="1" i="0">
-                <a:solidFill>
-                  <a:srgbClr val="438B86"/>
-                </a:solidFill>
-                <a:latin typeface="Times New Roman"/>
-                <a:ea typeface="Times New Roman"/>
-                <a:cs typeface="Times New Roman"/>
-              </a:defRPr>
-            </a:pPr>
-            <a:r>
-              <a:rPr sz="1275" b="1" i="0">
-                <a:solidFill>
-                  <a:srgbClr val="438B86"/>
-                </a:solidFill>
-                <a:latin typeface="Times New Roman"/>
-                <a:ea typeface="Times New Roman"/>
-                <a:cs typeface="Times New Roman"/>
-              </a:rPr>
-              <a:t>Evidence acquisition</a:t>
-            </a:r>
-          </a:p>
-        </p:txBody>
-      </p:sp>
-      <p:sp>
-        <p:nvSpPr>
-          <p:cNvPr id="5" name="">
-            <a:extLst xmlns:a="http://schemas.openxmlformats.org/drawingml/2006/main">
-              <a:ext uri="{FF2B5EF4-FFF2-40B4-BE49-F238E27FC236}">
-                <a16:creationId xmlns:a16="http://schemas.microsoft.com/office/drawing/2014/main" id="{26B4E1AE-C756-4849-AC5D-3C17933DCC14}"/>
-              </a:ext>
-            </a:extLst>
-          </p:cNvPr>
-          <p:cNvSpPr>
-            <a:spLocks xmlns:a="http://schemas.openxmlformats.org/drawingml/2006/main" noGrp="1"/>
-          </p:cNvSpPr>
-          <p:nvPr/>
-        </p:nvSpPr>
-        <p:spPr>
-          <a:xfrm xmlns:a="http://schemas.openxmlformats.org/drawingml/2006/main">
-            <a:off x="685800" y="2876550"/>
-            <a:ext cx="2057400" cy="619125"/>
-          </a:xfrm>
-          <a:prstGeom xmlns:a="http://schemas.openxmlformats.org/drawingml/2006/main" prst="rect">
-            <a:avLst/>
-          </a:prstGeom>
-          <a:noFill xmlns:a="http://schemas.openxmlformats.org/drawingml/2006/main"/>
-          <a:ln xmlns:a="http://schemas.openxmlformats.org/drawingml/2006/main" w="0">
-            <a:noFill/>
-            <a:prstDash val="solid"/>
-          </a:ln>
-        </p:spPr>
-        <p:txBody>
-          <a:bodyPr xmlns:a="http://schemas.openxmlformats.org/drawingml/2006/main"/>
-          <a:lstStyle xmlns:a="http://schemas.openxmlformats.org/drawingml/2006/main"/>
-          <a:p xmlns:a="http://schemas.openxmlformats.org/drawingml/2006/main">
-            <a:pPr>
-              <a:defRPr sz="900" b="0" i="0">
-                <a:solidFill>
-                  <a:srgbClr val="303A4B"/>
-                </a:solidFill>
-                <a:latin typeface="Times New Roman"/>
-                <a:ea typeface="Times New Roman"/>
-                <a:cs typeface="Times New Roman"/>
-              </a:defRPr>
-            </a:pPr>
-            <a:r>
-              <a:rPr sz="900" b="0" i="0">
-                <a:solidFill>
-                  <a:srgbClr val="303A4B"/>
-                </a:solidFill>
-                <a:latin typeface="Times New Roman"/>
-                <a:ea typeface="Times New Roman"/>
-                <a:cs typeface="Times New Roman"/>
-              </a:rPr>
-              <a:t>retrieve signals and context</a:t>
-            </a:r>
-          </a:p>
-        </p:txBody>
-      </p:sp>
-      <p:sp>
-        <p:nvSpPr>
-          <p:cNvPr id="6" name="">
-            <a:extLst xmlns:a="http://schemas.openxmlformats.org/drawingml/2006/main">
-              <a:ext uri="{FF2B5EF4-FFF2-40B4-BE49-F238E27FC236}">
-                <a16:creationId xmlns:a16="http://schemas.microsoft.com/office/drawing/2014/main" id="{6F1692A9-4962-4C6B-976A-140BDBD701CE}"/>
-              </a:ext>
-            </a:extLst>
-          </p:cNvPr>
-          <p:cNvSpPr>
-            <a:spLocks xmlns:a="http://schemas.openxmlformats.org/drawingml/2006/main" noGrp="1"/>
-          </p:cNvSpPr>
-          <p:nvPr/>
-        </p:nvSpPr>
-        <p:spPr>
-          <a:xfrm xmlns:a="http://schemas.openxmlformats.org/drawingml/2006/main">
-            <a:off x="3333750" y="2476500"/>
-            <a:ext cx="2286000" cy="1095375"/>
-          </a:xfrm>
-          <a:prstGeom xmlns:a="http://schemas.openxmlformats.org/drawingml/2006/main" prst="roundRect">
-            <a:avLst>
-              <a:gd name="adj" fmla="val 6957"/>
-            </a:avLst>
-          </a:prstGeom>
-          <a:solidFill xmlns:a="http://schemas.openxmlformats.org/drawingml/2006/main">
-            <a:srgbClr val="DDEEDC"/>
-          </a:solidFill>
-          <a:ln xmlns:a="http://schemas.openxmlformats.org/drawingml/2006/main" w="13335">
-            <a:solidFill>
-              <a:srgbClr val="438B86"/>
+            <a:ln xmlns:a="http://schemas.openxmlformats.org/drawingml/2006/main" w="13335">
+              <a:solidFill>
+                <a:srgbClr val="438B86"/>
+              </a:solidFill>
+              <a:prstDash val="solid"/>
+            </a:ln>
+          </p:spPr>
+        </p:sp>
+        <p:sp>
+          <p:nvSpPr>
+            <p:cNvPr id="2" name="">
+              <a:extLst xmlns:a="http://schemas.openxmlformats.org/drawingml/2006/main">
+                <a:ext uri="{FF2B5EF4-FFF2-40B4-BE49-F238E27FC236}">
+                  <a16:creationId xmlns:a16="http://schemas.microsoft.com/office/drawing/2014/main" id="{7AA180A0-1412-437F-9CD6-A0517A50EF1E}"/>
+                </a:ext>
+              </a:extLst>
+            </p:cNvPr>
+            <p:cNvSpPr>
+              <a:spLocks xmlns:a="http://schemas.openxmlformats.org/drawingml/2006/main"/>
+            </p:cNvSpPr>
+            <p:nvPr/>
+          </p:nvSpPr>
+          <p:spPr>
+            <a:xfrm xmlns:a="http://schemas.openxmlformats.org/drawingml/2006/main">
+              <a:off x="666750" y="2571750"/>
+              <a:ext cx="2095500" cy="266700"/>
+            </a:xfrm>
+            <a:prstGeom xmlns:a="http://schemas.openxmlformats.org/drawingml/2006/main" prst="rect">
+              <a:avLst/>
+            </a:prstGeom>
+            <a:noFill xmlns:a="http://schemas.openxmlformats.org/drawingml/2006/main"/>
+            <a:ln xmlns:a="http://schemas.openxmlformats.org/drawingml/2006/main" w="0">
+              <a:noFill/>
+              <a:prstDash val="solid"/>
+            </a:ln>
+          </p:spPr>
+          <p:txBody>
+            <a:bodyPr xmlns:a="http://schemas.openxmlformats.org/drawingml/2006/main"/>
+            <a:lstStyle xmlns:a="http://schemas.openxmlformats.org/drawingml/2006/main"/>
+            <a:p xmlns:a="http://schemas.openxmlformats.org/drawingml/2006/main">
+              <a:pPr>
+                <a:defRPr sz="1275" b="1" i="0">
+                  <a:solidFill>
+                    <a:srgbClr val="438B86"/>
+                  </a:solidFill>
+                  <a:latin typeface="Times New Roman"/>
+                  <a:ea typeface="Times New Roman"/>
+                  <a:cs typeface="Times New Roman"/>
+                </a:defRPr>
+              </a:pPr>
+              <a:r>
+                <a:rPr sz="1275" b="1" i="0">
+                  <a:solidFill>
+                    <a:srgbClr val="438B86"/>
+                  </a:solidFill>
+                  <a:latin typeface="Times New Roman"/>
+                  <a:ea typeface="Times New Roman"/>
+                  <a:cs typeface="Times New Roman"/>
+                </a:rPr>
+                <a:t>Evidence acquisition</a:t>
+              </a:r>
+            </a:p>
+          </p:txBody>
+        </p:sp>
+        <p:sp>
+          <p:nvSpPr>
+            <p:cNvPr id="3" name="">
+              <a:extLst xmlns:a="http://schemas.openxmlformats.org/drawingml/2006/main">
+                <a:ext uri="{FF2B5EF4-FFF2-40B4-BE49-F238E27FC236}">
+                  <a16:creationId xmlns:a16="http://schemas.microsoft.com/office/drawing/2014/main" id="{0BDBACBF-9000-431A-9E70-553FF712D774}"/>
+                </a:ext>
+              </a:extLst>
+            </p:cNvPr>
+            <p:cNvSpPr>
+              <a:spLocks xmlns:a="http://schemas.openxmlformats.org/drawingml/2006/main"/>
+            </p:cNvSpPr>
+            <p:nvPr/>
+          </p:nvSpPr>
+          <p:spPr>
+            <a:xfrm xmlns:a="http://schemas.openxmlformats.org/drawingml/2006/main">
+              <a:off x="685800" y="2876550"/>
+              <a:ext cx="2057400" cy="619125"/>
+            </a:xfrm>
+            <a:prstGeom xmlns:a="http://schemas.openxmlformats.org/drawingml/2006/main" prst="rect">
+              <a:avLst/>
+            </a:prstGeom>
+            <a:noFill xmlns:a="http://schemas.openxmlformats.org/drawingml/2006/main"/>
+            <a:ln xmlns:a="http://schemas.openxmlformats.org/drawingml/2006/main" w="0">
+              <a:noFill/>
+              <a:prstDash val="solid"/>
+            </a:ln>
+          </p:spPr>
+          <p:txBody>
+            <a:bodyPr xmlns:a="http://schemas.openxmlformats.org/drawingml/2006/main"/>
+            <a:lstStyle xmlns:a="http://schemas.openxmlformats.org/drawingml/2006/main"/>
+            <a:p xmlns:a="http://schemas.openxmlformats.org/drawingml/2006/main">
+              <a:pPr>
+                <a:defRPr sz="900" b="0" i="0">
+                  <a:solidFill>
+                    <a:srgbClr val="303A4B"/>
+                  </a:solidFill>
+                  <a:latin typeface="Times New Roman"/>
+                  <a:ea typeface="Times New Roman"/>
+                  <a:cs typeface="Times New Roman"/>
+                </a:defRPr>
+              </a:pPr>
+              <a:r>
+                <a:rPr sz="900" b="0" i="0">
+                  <a:solidFill>
+                    <a:srgbClr val="303A4B"/>
+                  </a:solidFill>
+                  <a:latin typeface="Times New Roman"/>
+                  <a:ea typeface="Times New Roman"/>
+                  <a:cs typeface="Times New Roman"/>
+                </a:rPr>
+                <a:t>retrieve signals and context</a:t>
+              </a:r>
+            </a:p>
+          </p:txBody>
+        </p:sp>
+        <p:sp>
+          <p:nvSpPr>
+            <p:cNvPr id="4" name="">
+              <a:extLst xmlns:a="http://schemas.openxmlformats.org/drawingml/2006/main">
+                <a:ext uri="{FF2B5EF4-FFF2-40B4-BE49-F238E27FC236}">
+                  <a16:creationId xmlns:a16="http://schemas.microsoft.com/office/drawing/2014/main" id="{59039F02-9D19-4BCC-A33B-3ABA2A627F4F}"/>
+                </a:ext>
+              </a:extLst>
+            </p:cNvPr>
+            <p:cNvSpPr>
+              <a:spLocks xmlns:a="http://schemas.openxmlformats.org/drawingml/2006/main"/>
+            </p:cNvSpPr>
+            <p:nvPr/>
+          </p:nvSpPr>
+          <p:spPr>
+            <a:xfrm xmlns:a="http://schemas.openxmlformats.org/drawingml/2006/main">
+              <a:off x="3333750" y="2476500"/>
+              <a:ext cx="2286000" cy="1095375"/>
+            </a:xfrm>
+            <a:prstGeom xmlns:a="http://schemas.openxmlformats.org/drawingml/2006/main" prst="roundRect">
+              <a:avLst>
+                <a:gd name="adj" fmla="val 6957"/>
+              </a:avLst>
+            </a:prstGeom>
+            <a:solidFill xmlns:a="http://schemas.openxmlformats.org/drawingml/2006/main">
+              <a:srgbClr val="DDEEDC"/>
             </a:solidFill>
-            <a:prstDash val="solid"/>
-          </a:ln>
-        </p:spPr>
-      </p:sp>
-      <p:sp>
-        <p:nvSpPr>
-          <p:cNvPr id="7" name="">
-            <a:extLst xmlns:a="http://schemas.openxmlformats.org/drawingml/2006/main">
-              <a:ext uri="{FF2B5EF4-FFF2-40B4-BE49-F238E27FC236}">
-                <a16:creationId xmlns:a16="http://schemas.microsoft.com/office/drawing/2014/main" id="{40084019-0D6B-4DE5-AC76-D4ACCD82A6D5}"/>
-              </a:ext>
-            </a:extLst>
-          </p:cNvPr>
-          <p:cNvSpPr>
-            <a:spLocks xmlns:a="http://schemas.openxmlformats.org/drawingml/2006/main" noGrp="1"/>
-          </p:cNvSpPr>
-          <p:nvPr/>
-        </p:nvSpPr>
-        <p:spPr>
-          <a:xfrm xmlns:a="http://schemas.openxmlformats.org/drawingml/2006/main">
-            <a:off x="3429000" y="2571750"/>
-            <a:ext cx="2095500" cy="266700"/>
-          </a:xfrm>
-          <a:prstGeom xmlns:a="http://schemas.openxmlformats.org/drawingml/2006/main" prst="rect">
-            <a:avLst/>
-          </a:prstGeom>
-          <a:noFill xmlns:a="http://schemas.openxmlformats.org/drawingml/2006/main"/>
-          <a:ln xmlns:a="http://schemas.openxmlformats.org/drawingml/2006/main" w="0">
-            <a:noFill/>
-            <a:prstDash val="solid"/>
-          </a:ln>
-        </p:spPr>
-        <p:txBody>
-          <a:bodyPr xmlns:a="http://schemas.openxmlformats.org/drawingml/2006/main"/>
-          <a:lstStyle xmlns:a="http://schemas.openxmlformats.org/drawingml/2006/main"/>
-          <a:p xmlns:a="http://schemas.openxmlformats.org/drawingml/2006/main">
-            <a:pPr>
-              <a:defRPr sz="1275" b="1" i="0">
-                <a:solidFill>
-                  <a:srgbClr val="438B86"/>
-                </a:solidFill>
-                <a:latin typeface="Times New Roman"/>
-                <a:ea typeface="Times New Roman"/>
-                <a:cs typeface="Times New Roman"/>
-              </a:defRPr>
-            </a:pPr>
-            <a:r>
-              <a:rPr sz="1275" b="1" i="0">
-                <a:solidFill>
-                  <a:srgbClr val="438B86"/>
-                </a:solidFill>
-                <a:latin typeface="Times New Roman"/>
-                <a:ea typeface="Times New Roman"/>
-                <a:cs typeface="Times New Roman"/>
-              </a:rPr>
-              <a:t>Evidence construction</a:t>
-            </a:r>
-          </a:p>
-        </p:txBody>
-      </p:sp>
-      <p:sp>
-        <p:nvSpPr>
-          <p:cNvPr id="8" name="">
-            <a:extLst xmlns:a="http://schemas.openxmlformats.org/drawingml/2006/main">
-              <a:ext uri="{FF2B5EF4-FFF2-40B4-BE49-F238E27FC236}">
-                <a16:creationId xmlns:a16="http://schemas.microsoft.com/office/drawing/2014/main" id="{B5D80B73-D20B-459E-9C44-04C65C7CF41E}"/>
-              </a:ext>
-            </a:extLst>
-          </p:cNvPr>
-          <p:cNvSpPr>
-            <a:spLocks xmlns:a="http://schemas.openxmlformats.org/drawingml/2006/main" noGrp="1"/>
-          </p:cNvSpPr>
-          <p:nvPr/>
-        </p:nvSpPr>
-        <p:spPr>
-          <a:xfrm xmlns:a="http://schemas.openxmlformats.org/drawingml/2006/main">
-            <a:off x="3448050" y="2876550"/>
-            <a:ext cx="2057400" cy="619125"/>
-          </a:xfrm>
-          <a:prstGeom xmlns:a="http://schemas.openxmlformats.org/drawingml/2006/main" prst="rect">
-            <a:avLst/>
-          </a:prstGeom>
-          <a:noFill xmlns:a="http://schemas.openxmlformats.org/drawingml/2006/main"/>
-          <a:ln xmlns:a="http://schemas.openxmlformats.org/drawingml/2006/main" w="0">
-            <a:noFill/>
-            <a:prstDash val="solid"/>
-          </a:ln>
-        </p:spPr>
-        <p:txBody>
-          <a:bodyPr xmlns:a="http://schemas.openxmlformats.org/drawingml/2006/main"/>
-          <a:lstStyle xmlns:a="http://schemas.openxmlformats.org/drawingml/2006/main"/>
-          <a:p xmlns:a="http://schemas.openxmlformats.org/drawingml/2006/main">
-            <a:pPr>
-              <a:defRPr sz="900" b="0" i="0">
-                <a:solidFill>
-                  <a:srgbClr val="303A4B"/>
-                </a:solidFill>
-                <a:latin typeface="Times New Roman"/>
-                <a:ea typeface="Times New Roman"/>
-                <a:cs typeface="Times New Roman"/>
-              </a:defRPr>
-            </a:pPr>
-            <a:r>
-              <a:rPr sz="900" b="0" i="0">
-                <a:solidFill>
-                  <a:srgbClr val="303A4B"/>
-                </a:solidFill>
-                <a:latin typeface="Times New Roman"/>
-                <a:ea typeface="Times New Roman"/>
-                <a:cs typeface="Times New Roman"/>
-              </a:rPr>
-              <a:t>align and summarize evidence</a:t>
-            </a:r>
-          </a:p>
-        </p:txBody>
-      </p:sp>
-      <p:sp>
-        <p:nvSpPr>
-          <p:cNvPr id="9" name="">
-            <a:extLst xmlns:a="http://schemas.openxmlformats.org/drawingml/2006/main">
-              <a:ext uri="{FF2B5EF4-FFF2-40B4-BE49-F238E27FC236}">
-                <a16:creationId xmlns:a16="http://schemas.microsoft.com/office/drawing/2014/main" id="{EFD31150-9CAF-48B2-AE52-326F35DD3379}"/>
-              </a:ext>
-            </a:extLst>
-          </p:cNvPr>
-          <p:cNvSpPr>
-            <a:spLocks xmlns:a="http://schemas.openxmlformats.org/drawingml/2006/main" noGrp="1"/>
-          </p:cNvSpPr>
-          <p:nvPr/>
-        </p:nvSpPr>
-        <p:spPr>
-          <a:xfrm xmlns:a="http://schemas.openxmlformats.org/drawingml/2006/main">
-            <a:off x="6096000" y="2476500"/>
-            <a:ext cx="2286000" cy="1095375"/>
-          </a:xfrm>
-          <a:prstGeom xmlns:a="http://schemas.openxmlformats.org/drawingml/2006/main" prst="roundRect">
-            <a:avLst>
-              <a:gd name="adj" fmla="val 6957"/>
-            </a:avLst>
-          </a:prstGeom>
-          <a:solidFill xmlns:a="http://schemas.openxmlformats.org/drawingml/2006/main">
-            <a:srgbClr val="F4F0C9"/>
-          </a:solidFill>
-          <a:ln xmlns:a="http://schemas.openxmlformats.org/drawingml/2006/main" w="13335">
-            <a:solidFill>
-              <a:srgbClr val="B77F2B"/>
+            <a:ln xmlns:a="http://schemas.openxmlformats.org/drawingml/2006/main" w="13335">
+              <a:solidFill>
+                <a:srgbClr val="438B86"/>
+              </a:solidFill>
+              <a:prstDash val="solid"/>
+            </a:ln>
+          </p:spPr>
+        </p:sp>
+        <p:sp>
+          <p:nvSpPr>
+            <p:cNvPr id="5" name="">
+              <a:extLst xmlns:a="http://schemas.openxmlformats.org/drawingml/2006/main">
+                <a:ext uri="{FF2B5EF4-FFF2-40B4-BE49-F238E27FC236}">
+                  <a16:creationId xmlns:a16="http://schemas.microsoft.com/office/drawing/2014/main" id="{2B072089-7363-4F16-B170-DD3F5F1840A1}"/>
+                </a:ext>
+              </a:extLst>
+            </p:cNvPr>
+            <p:cNvSpPr>
+              <a:spLocks xmlns:a="http://schemas.openxmlformats.org/drawingml/2006/main"/>
+            </p:cNvSpPr>
+            <p:nvPr/>
+          </p:nvSpPr>
+          <p:spPr>
+            <a:xfrm xmlns:a="http://schemas.openxmlformats.org/drawingml/2006/main">
+              <a:off x="3429000" y="2571750"/>
+              <a:ext cx="2095500" cy="457200"/>
+            </a:xfrm>
+            <a:prstGeom xmlns:a="http://schemas.openxmlformats.org/drawingml/2006/main" prst="rect">
+              <a:avLst/>
+            </a:prstGeom>
+            <a:noFill xmlns:a="http://schemas.openxmlformats.org/drawingml/2006/main"/>
+            <a:ln xmlns:a="http://schemas.openxmlformats.org/drawingml/2006/main" w="0">
+              <a:noFill/>
+              <a:prstDash val="solid"/>
+            </a:ln>
+          </p:spPr>
+          <p:txBody>
+            <a:bodyPr xmlns:a="http://schemas.openxmlformats.org/drawingml/2006/main"/>
+            <a:lstStyle xmlns:a="http://schemas.openxmlformats.org/drawingml/2006/main"/>
+            <a:p xmlns:a="http://schemas.openxmlformats.org/drawingml/2006/main">
+              <a:pPr>
+                <a:defRPr sz="1275" b="1" i="0">
+                  <a:solidFill>
+                    <a:srgbClr val="438B86"/>
+                  </a:solidFill>
+                  <a:latin typeface="Times New Roman"/>
+                  <a:ea typeface="Times New Roman"/>
+                  <a:cs typeface="Times New Roman"/>
+                </a:defRPr>
+              </a:pPr>
+              <a:r>
+                <a:rPr sz="1275" b="1" i="0">
+                  <a:solidFill>
+                    <a:srgbClr val="438B86"/>
+                  </a:solidFill>
+                  <a:latin typeface="Times New Roman"/>
+                  <a:ea typeface="Times New Roman"/>
+                  <a:cs typeface="Times New Roman"/>
+                </a:rPr>
+                <a:t>Adaptive evidence construction</a:t>
+              </a:r>
+            </a:p>
+          </p:txBody>
+        </p:sp>
+        <p:sp>
+          <p:nvSpPr>
+            <p:cNvPr id="6" name="">
+              <a:extLst xmlns:a="http://schemas.openxmlformats.org/drawingml/2006/main">
+                <a:ext uri="{FF2B5EF4-FFF2-40B4-BE49-F238E27FC236}">
+                  <a16:creationId xmlns:a16="http://schemas.microsoft.com/office/drawing/2014/main" id="{94BD43F2-B306-46BA-813E-82844392F2C3}"/>
+                </a:ext>
+              </a:extLst>
+            </p:cNvPr>
+            <p:cNvSpPr>
+              <a:spLocks xmlns:a="http://schemas.openxmlformats.org/drawingml/2006/main"/>
+            </p:cNvSpPr>
+            <p:nvPr/>
+          </p:nvSpPr>
+          <p:spPr>
+            <a:xfrm xmlns:a="http://schemas.openxmlformats.org/drawingml/2006/main">
+              <a:off x="3448050" y="3124200"/>
+              <a:ext cx="2057400" cy="371475"/>
+            </a:xfrm>
+            <a:prstGeom xmlns:a="http://schemas.openxmlformats.org/drawingml/2006/main" prst="rect">
+              <a:avLst/>
+            </a:prstGeom>
+            <a:noFill xmlns:a="http://schemas.openxmlformats.org/drawingml/2006/main"/>
+            <a:ln xmlns:a="http://schemas.openxmlformats.org/drawingml/2006/main" w="0">
+              <a:noFill/>
+              <a:prstDash val="solid"/>
+            </a:ln>
+          </p:spPr>
+          <p:txBody>
+            <a:bodyPr xmlns:a="http://schemas.openxmlformats.org/drawingml/2006/main"/>
+            <a:lstStyle xmlns:a="http://schemas.openxmlformats.org/drawingml/2006/main"/>
+            <a:p xmlns:a="http://schemas.openxmlformats.org/drawingml/2006/main">
+              <a:pPr>
+                <a:defRPr sz="900" b="0" i="0">
+                  <a:solidFill>
+                    <a:srgbClr val="303A4B"/>
+                  </a:solidFill>
+                  <a:latin typeface="Times New Roman"/>
+                  <a:ea typeface="Times New Roman"/>
+                  <a:cs typeface="Times New Roman"/>
+                </a:defRPr>
+              </a:pPr>
+              <a:r>
+                <a:rPr sz="900" b="0" i="0">
+                  <a:solidFill>
+                    <a:srgbClr val="303A4B"/>
+                  </a:solidFill>
+                  <a:latin typeface="Times New Roman"/>
+                  <a:ea typeface="Times New Roman"/>
+                  <a:cs typeface="Times New Roman"/>
+                </a:rPr>
+                <a:t>construct diagnostic evidence</a:t>
+              </a:r>
+            </a:p>
+          </p:txBody>
+        </p:sp>
+        <p:sp>
+          <p:nvSpPr>
+            <p:cNvPr id="7" name="">
+              <a:extLst xmlns:a="http://schemas.openxmlformats.org/drawingml/2006/main">
+                <a:ext uri="{FF2B5EF4-FFF2-40B4-BE49-F238E27FC236}">
+                  <a16:creationId xmlns:a16="http://schemas.microsoft.com/office/drawing/2014/main" id="{9DC32BD0-DF1E-4736-B568-C38251B848C2}"/>
+                </a:ext>
+              </a:extLst>
+            </p:cNvPr>
+            <p:cNvSpPr>
+              <a:spLocks xmlns:a="http://schemas.openxmlformats.org/drawingml/2006/main"/>
+            </p:cNvSpPr>
+            <p:nvPr/>
+          </p:nvSpPr>
+          <p:spPr>
+            <a:xfrm xmlns:a="http://schemas.openxmlformats.org/drawingml/2006/main">
+              <a:off x="6096000" y="2476500"/>
+              <a:ext cx="2286000" cy="1095375"/>
+            </a:xfrm>
+            <a:prstGeom xmlns:a="http://schemas.openxmlformats.org/drawingml/2006/main" prst="roundRect">
+              <a:avLst>
+                <a:gd name="adj" fmla="val 6957"/>
+              </a:avLst>
+            </a:prstGeom>
+            <a:solidFill xmlns:a="http://schemas.openxmlformats.org/drawingml/2006/main">
+              <a:srgbClr val="F4F0C9"/>
             </a:solidFill>
-            <a:prstDash val="solid"/>
-          </a:ln>
-        </p:spPr>
-      </p:sp>
-      <p:sp>
-        <p:nvSpPr>
-          <p:cNvPr id="10" name="">
-            <a:extLst xmlns:a="http://schemas.openxmlformats.org/drawingml/2006/main">
-              <a:ext uri="{FF2B5EF4-FFF2-40B4-BE49-F238E27FC236}">
-                <a16:creationId xmlns:a16="http://schemas.microsoft.com/office/drawing/2014/main" id="{3718C8FF-B5AA-42E8-9E56-3DBDFBF7348B}"/>
-              </a:ext>
-            </a:extLst>
-          </p:cNvPr>
-          <p:cNvSpPr>
-            <a:spLocks xmlns:a="http://schemas.openxmlformats.org/drawingml/2006/main" noGrp="1"/>
-          </p:cNvSpPr>
-          <p:nvPr/>
-        </p:nvSpPr>
-        <p:spPr>
-          <a:xfrm xmlns:a="http://schemas.openxmlformats.org/drawingml/2006/main">
-            <a:off x="6191250" y="2571750"/>
-            <a:ext cx="2095500" cy="266700"/>
-          </a:xfrm>
-          <a:prstGeom xmlns:a="http://schemas.openxmlformats.org/drawingml/2006/main" prst="rect">
-            <a:avLst/>
-          </a:prstGeom>
-          <a:noFill xmlns:a="http://schemas.openxmlformats.org/drawingml/2006/main"/>
-          <a:ln xmlns:a="http://schemas.openxmlformats.org/drawingml/2006/main" w="0">
-            <a:noFill/>
-            <a:prstDash val="solid"/>
-          </a:ln>
-        </p:spPr>
-        <p:txBody>
-          <a:bodyPr xmlns:a="http://schemas.openxmlformats.org/drawingml/2006/main"/>
-          <a:lstStyle xmlns:a="http://schemas.openxmlformats.org/drawingml/2006/main"/>
-          <a:p xmlns:a="http://schemas.openxmlformats.org/drawingml/2006/main">
-            <a:pPr>
-              <a:defRPr sz="1275" b="1" i="0">
-                <a:solidFill>
-                  <a:srgbClr val="B77F2B"/>
-                </a:solidFill>
-                <a:latin typeface="Times New Roman"/>
-                <a:ea typeface="Times New Roman"/>
-                <a:cs typeface="Times New Roman"/>
-              </a:defRPr>
-            </a:pPr>
-            <a:r>
-              <a:rPr sz="1275" b="1" i="0">
-                <a:solidFill>
-                  <a:srgbClr val="B77F2B"/>
-                </a:solidFill>
-                <a:latin typeface="Times New Roman"/>
-                <a:ea typeface="Times New Roman"/>
-                <a:cs typeface="Times New Roman"/>
-              </a:rPr>
-              <a:t>Anomaly detection</a:t>
-            </a:r>
-          </a:p>
-        </p:txBody>
-      </p:sp>
-      <p:sp>
-        <p:nvSpPr>
-          <p:cNvPr id="11" name="">
-            <a:extLst xmlns:a="http://schemas.openxmlformats.org/drawingml/2006/main">
-              <a:ext uri="{FF2B5EF4-FFF2-40B4-BE49-F238E27FC236}">
-                <a16:creationId xmlns:a16="http://schemas.microsoft.com/office/drawing/2014/main" id="{6FC3EB7E-3A1A-413A-BC70-E75EA23C7C30}"/>
-              </a:ext>
-            </a:extLst>
-          </p:cNvPr>
-          <p:cNvSpPr>
-            <a:spLocks xmlns:a="http://schemas.openxmlformats.org/drawingml/2006/main" noGrp="1"/>
-          </p:cNvSpPr>
-          <p:nvPr/>
-        </p:nvSpPr>
-        <p:spPr>
-          <a:xfrm xmlns:a="http://schemas.openxmlformats.org/drawingml/2006/main">
-            <a:off x="6210300" y="2876550"/>
-            <a:ext cx="2057400" cy="619125"/>
-          </a:xfrm>
-          <a:prstGeom xmlns:a="http://schemas.openxmlformats.org/drawingml/2006/main" prst="rect">
-            <a:avLst/>
-          </a:prstGeom>
-          <a:noFill xmlns:a="http://schemas.openxmlformats.org/drawingml/2006/main"/>
-          <a:ln xmlns:a="http://schemas.openxmlformats.org/drawingml/2006/main" w="0">
-            <a:noFill/>
-            <a:prstDash val="solid"/>
-          </a:ln>
-        </p:spPr>
-        <p:txBody>
-          <a:bodyPr xmlns:a="http://schemas.openxmlformats.org/drawingml/2006/main"/>
-          <a:lstStyle xmlns:a="http://schemas.openxmlformats.org/drawingml/2006/main"/>
-          <a:p xmlns:a="http://schemas.openxmlformats.org/drawingml/2006/main">
-            <a:pPr>
-              <a:defRPr sz="900" b="0" i="0">
-                <a:solidFill>
-                  <a:srgbClr val="303A4B"/>
-                </a:solidFill>
-                <a:latin typeface="Times New Roman"/>
-                <a:ea typeface="Times New Roman"/>
-                <a:cs typeface="Times New Roman"/>
-              </a:defRPr>
-            </a:pPr>
-            <a:r>
-              <a:rPr sz="900" b="0" i="0">
-                <a:solidFill>
-                  <a:srgbClr val="303A4B"/>
-                </a:solidFill>
-                <a:latin typeface="Times New Roman"/>
-                <a:ea typeface="Times New Roman"/>
-                <a:cs typeface="Times New Roman"/>
-              </a:rPr>
-              <a:t>score candidate events</a:t>
-            </a:r>
-          </a:p>
-        </p:txBody>
-      </p:sp>
-      <p:sp>
-        <p:nvSpPr>
-          <p:cNvPr id="12" name="">
-            <a:extLst xmlns:a="http://schemas.openxmlformats.org/drawingml/2006/main">
-              <a:ext uri="{FF2B5EF4-FFF2-40B4-BE49-F238E27FC236}">
-                <a16:creationId xmlns:a16="http://schemas.microsoft.com/office/drawing/2014/main" id="{95466483-917A-4E50-A464-756828DAEB1C}"/>
-              </a:ext>
-            </a:extLst>
-          </p:cNvPr>
-          <p:cNvSpPr>
-            <a:spLocks xmlns:a="http://schemas.openxmlformats.org/drawingml/2006/main" noGrp="1"/>
-          </p:cNvSpPr>
-          <p:nvPr/>
-        </p:nvSpPr>
-        <p:spPr>
-          <a:xfrm xmlns:a="http://schemas.openxmlformats.org/drawingml/2006/main">
-            <a:off x="8858250" y="2476500"/>
-            <a:ext cx="2286000" cy="1095375"/>
-          </a:xfrm>
-          <a:prstGeom xmlns:a="http://schemas.openxmlformats.org/drawingml/2006/main" prst="roundRect">
-            <a:avLst>
-              <a:gd name="adj" fmla="val 6957"/>
-            </a:avLst>
-          </a:prstGeom>
-          <a:solidFill xmlns:a="http://schemas.openxmlformats.org/drawingml/2006/main">
-            <a:srgbClr val="F3E2DE"/>
-          </a:solidFill>
-          <a:ln xmlns:a="http://schemas.openxmlformats.org/drawingml/2006/main" w="13335">
-            <a:solidFill>
-              <a:srgbClr val="B86659"/>
+            <a:ln xmlns:a="http://schemas.openxmlformats.org/drawingml/2006/main" w="13335">
+              <a:solidFill>
+                <a:srgbClr val="B77F2B"/>
+              </a:solidFill>
+              <a:prstDash val="solid"/>
+            </a:ln>
+          </p:spPr>
+        </p:sp>
+        <p:sp>
+          <p:nvSpPr>
+            <p:cNvPr id="8" name="">
+              <a:extLst xmlns:a="http://schemas.openxmlformats.org/drawingml/2006/main">
+                <a:ext uri="{FF2B5EF4-FFF2-40B4-BE49-F238E27FC236}">
+                  <a16:creationId xmlns:a16="http://schemas.microsoft.com/office/drawing/2014/main" id="{0B2D05D2-E533-4A70-9139-A004B5783202}"/>
+                </a:ext>
+              </a:extLst>
+            </p:cNvPr>
+            <p:cNvSpPr>
+              <a:spLocks xmlns:a="http://schemas.openxmlformats.org/drawingml/2006/main"/>
+            </p:cNvSpPr>
+            <p:nvPr/>
+          </p:nvSpPr>
+          <p:spPr>
+            <a:xfrm xmlns:a="http://schemas.openxmlformats.org/drawingml/2006/main">
+              <a:off x="6191250" y="2571750"/>
+              <a:ext cx="2095500" cy="266700"/>
+            </a:xfrm>
+            <a:prstGeom xmlns:a="http://schemas.openxmlformats.org/drawingml/2006/main" prst="rect">
+              <a:avLst/>
+            </a:prstGeom>
+            <a:noFill xmlns:a="http://schemas.openxmlformats.org/drawingml/2006/main"/>
+            <a:ln xmlns:a="http://schemas.openxmlformats.org/drawingml/2006/main" w="0">
+              <a:noFill/>
+              <a:prstDash val="solid"/>
+            </a:ln>
+          </p:spPr>
+          <p:txBody>
+            <a:bodyPr xmlns:a="http://schemas.openxmlformats.org/drawingml/2006/main"/>
+            <a:lstStyle xmlns:a="http://schemas.openxmlformats.org/drawingml/2006/main"/>
+            <a:p xmlns:a="http://schemas.openxmlformats.org/drawingml/2006/main">
+              <a:pPr>
+                <a:defRPr sz="1275" b="1" i="0">
+                  <a:solidFill>
+                    <a:srgbClr val="B77F2B"/>
+                  </a:solidFill>
+                  <a:latin typeface="Times New Roman"/>
+                  <a:ea typeface="Times New Roman"/>
+                  <a:cs typeface="Times New Roman"/>
+                </a:defRPr>
+              </a:pPr>
+              <a:r>
+                <a:rPr sz="1275" b="1" i="0">
+                  <a:solidFill>
+                    <a:srgbClr val="B77F2B"/>
+                  </a:solidFill>
+                  <a:latin typeface="Times New Roman"/>
+                  <a:ea typeface="Times New Roman"/>
+                  <a:cs typeface="Times New Roman"/>
+                </a:rPr>
+                <a:t>Anomaly detection</a:t>
+              </a:r>
+            </a:p>
+          </p:txBody>
+        </p:sp>
+        <p:sp>
+          <p:nvSpPr>
+            <p:cNvPr id="9" name="">
+              <a:extLst xmlns:a="http://schemas.openxmlformats.org/drawingml/2006/main">
+                <a:ext uri="{FF2B5EF4-FFF2-40B4-BE49-F238E27FC236}">
+                  <a16:creationId xmlns:a16="http://schemas.microsoft.com/office/drawing/2014/main" id="{F77169F1-06CD-4C21-A59B-02C726176CD3}"/>
+                </a:ext>
+              </a:extLst>
+            </p:cNvPr>
+            <p:cNvSpPr>
+              <a:spLocks xmlns:a="http://schemas.openxmlformats.org/drawingml/2006/main"/>
+            </p:cNvSpPr>
+            <p:nvPr/>
+          </p:nvSpPr>
+          <p:spPr>
+            <a:xfrm xmlns:a="http://schemas.openxmlformats.org/drawingml/2006/main">
+              <a:off x="6210300" y="2876550"/>
+              <a:ext cx="2057400" cy="619125"/>
+            </a:xfrm>
+            <a:prstGeom xmlns:a="http://schemas.openxmlformats.org/drawingml/2006/main" prst="rect">
+              <a:avLst/>
+            </a:prstGeom>
+            <a:noFill xmlns:a="http://schemas.openxmlformats.org/drawingml/2006/main"/>
+            <a:ln xmlns:a="http://schemas.openxmlformats.org/drawingml/2006/main" w="0">
+              <a:noFill/>
+              <a:prstDash val="solid"/>
+            </a:ln>
+          </p:spPr>
+          <p:txBody>
+            <a:bodyPr xmlns:a="http://schemas.openxmlformats.org/drawingml/2006/main"/>
+            <a:lstStyle xmlns:a="http://schemas.openxmlformats.org/drawingml/2006/main"/>
+            <a:p xmlns:a="http://schemas.openxmlformats.org/drawingml/2006/main">
+              <a:pPr>
+                <a:defRPr sz="900" b="0" i="0">
+                  <a:solidFill>
+                    <a:srgbClr val="303A4B"/>
+                  </a:solidFill>
+                  <a:latin typeface="Times New Roman"/>
+                  <a:ea typeface="Times New Roman"/>
+                  <a:cs typeface="Times New Roman"/>
+                </a:defRPr>
+              </a:pPr>
+              <a:r>
+                <a:rPr sz="900" b="0" i="0">
+                  <a:solidFill>
+                    <a:srgbClr val="303A4B"/>
+                  </a:solidFill>
+                  <a:latin typeface="Times New Roman"/>
+                  <a:ea typeface="Times New Roman"/>
+                  <a:cs typeface="Times New Roman"/>
+                </a:rPr>
+                <a:t>score candidate events</a:t>
+              </a:r>
+            </a:p>
+          </p:txBody>
+        </p:sp>
+        <p:sp>
+          <p:nvSpPr>
+            <p:cNvPr id="10" name="">
+              <a:extLst xmlns:a="http://schemas.openxmlformats.org/drawingml/2006/main">
+                <a:ext uri="{FF2B5EF4-FFF2-40B4-BE49-F238E27FC236}">
+                  <a16:creationId xmlns:a16="http://schemas.microsoft.com/office/drawing/2014/main" id="{E07E7F93-A204-49FC-BEAD-91DC6192EBE3}"/>
+                </a:ext>
+              </a:extLst>
+            </p:cNvPr>
+            <p:cNvSpPr>
+              <a:spLocks xmlns:a="http://schemas.openxmlformats.org/drawingml/2006/main"/>
+            </p:cNvSpPr>
+            <p:nvPr/>
+          </p:nvSpPr>
+          <p:spPr>
+            <a:xfrm xmlns:a="http://schemas.openxmlformats.org/drawingml/2006/main">
+              <a:off x="8858250" y="2476500"/>
+              <a:ext cx="2286000" cy="1095375"/>
+            </a:xfrm>
+            <a:prstGeom xmlns:a="http://schemas.openxmlformats.org/drawingml/2006/main" prst="roundRect">
+              <a:avLst>
+                <a:gd name="adj" fmla="val 6957"/>
+              </a:avLst>
+            </a:prstGeom>
+            <a:solidFill xmlns:a="http://schemas.openxmlformats.org/drawingml/2006/main">
+              <a:srgbClr val="F3E2DE"/>
             </a:solidFill>
-            <a:prstDash val="solid"/>
-          </a:ln>
-        </p:spPr>
-      </p:sp>
-      <p:sp>
-        <p:nvSpPr>
-          <p:cNvPr id="13" name="">
-            <a:extLst xmlns:a="http://schemas.openxmlformats.org/drawingml/2006/main">
-              <a:ext uri="{FF2B5EF4-FFF2-40B4-BE49-F238E27FC236}">
-                <a16:creationId xmlns:a16="http://schemas.microsoft.com/office/drawing/2014/main" id="{B63BFA5D-1406-4249-B41B-BB446F7D08BE}"/>
-              </a:ext>
-            </a:extLst>
-          </p:cNvPr>
-          <p:cNvSpPr>
-            <a:spLocks xmlns:a="http://schemas.openxmlformats.org/drawingml/2006/main" noGrp="1"/>
-          </p:cNvSpPr>
-          <p:nvPr/>
-        </p:nvSpPr>
-        <p:spPr>
-          <a:xfrm xmlns:a="http://schemas.openxmlformats.org/drawingml/2006/main">
-            <a:off x="8953500" y="2571750"/>
-            <a:ext cx="2095500" cy="266700"/>
-          </a:xfrm>
-          <a:prstGeom xmlns:a="http://schemas.openxmlformats.org/drawingml/2006/main" prst="rect">
-            <a:avLst/>
-          </a:prstGeom>
-          <a:noFill xmlns:a="http://schemas.openxmlformats.org/drawingml/2006/main"/>
-          <a:ln xmlns:a="http://schemas.openxmlformats.org/drawingml/2006/main" w="0">
-            <a:noFill/>
-            <a:prstDash val="solid"/>
-          </a:ln>
-        </p:spPr>
-        <p:txBody>
-          <a:bodyPr xmlns:a="http://schemas.openxmlformats.org/drawingml/2006/main"/>
-          <a:lstStyle xmlns:a="http://schemas.openxmlformats.org/drawingml/2006/main"/>
-          <a:p xmlns:a="http://schemas.openxmlformats.org/drawingml/2006/main">
-            <a:pPr>
-              <a:defRPr sz="1275" b="1" i="0">
-                <a:solidFill>
-                  <a:srgbClr val="B86659"/>
-                </a:solidFill>
-                <a:latin typeface="Times New Roman"/>
-                <a:ea typeface="Times New Roman"/>
-                <a:cs typeface="Times New Roman"/>
-              </a:defRPr>
-            </a:pPr>
-            <a:r>
-              <a:rPr sz="1275" b="1" i="0">
-                <a:solidFill>
-                  <a:srgbClr val="B86659"/>
-                </a:solidFill>
-                <a:latin typeface="Times New Roman"/>
-                <a:ea typeface="Times New Roman"/>
-                <a:cs typeface="Times New Roman"/>
-              </a:rPr>
-              <a:t>Diagnosis</a:t>
-            </a:r>
-          </a:p>
-        </p:txBody>
-      </p:sp>
-      <p:sp>
-        <p:nvSpPr>
-          <p:cNvPr id="14" name="">
-            <a:extLst xmlns:a="http://schemas.openxmlformats.org/drawingml/2006/main">
-              <a:ext uri="{FF2B5EF4-FFF2-40B4-BE49-F238E27FC236}">
-                <a16:creationId xmlns:a16="http://schemas.microsoft.com/office/drawing/2014/main" id="{4A6DDA81-9187-41FC-9DE5-9B894D464A65}"/>
-              </a:ext>
-            </a:extLst>
-          </p:cNvPr>
-          <p:cNvSpPr>
-            <a:spLocks xmlns:a="http://schemas.openxmlformats.org/drawingml/2006/main" noGrp="1"/>
-          </p:cNvSpPr>
-          <p:nvPr/>
-        </p:nvSpPr>
-        <p:spPr>
-          <a:xfrm xmlns:a="http://schemas.openxmlformats.org/drawingml/2006/main">
-            <a:off x="8972550" y="2876550"/>
-            <a:ext cx="2057400" cy="619125"/>
-          </a:xfrm>
-          <a:prstGeom xmlns:a="http://schemas.openxmlformats.org/drawingml/2006/main" prst="rect">
-            <a:avLst/>
-          </a:prstGeom>
-          <a:noFill xmlns:a="http://schemas.openxmlformats.org/drawingml/2006/main"/>
-          <a:ln xmlns:a="http://schemas.openxmlformats.org/drawingml/2006/main" w="0">
-            <a:noFill/>
-            <a:prstDash val="solid"/>
-          </a:ln>
-        </p:spPr>
-        <p:txBody>
-          <a:bodyPr xmlns:a="http://schemas.openxmlformats.org/drawingml/2006/main"/>
-          <a:lstStyle xmlns:a="http://schemas.openxmlformats.org/drawingml/2006/main"/>
-          <a:p xmlns:a="http://schemas.openxmlformats.org/drawingml/2006/main">
-            <a:pPr>
-              <a:defRPr sz="900" b="0" i="0">
-                <a:solidFill>
-                  <a:srgbClr val="303A4B"/>
-                </a:solidFill>
-                <a:latin typeface="Times New Roman"/>
-                <a:ea typeface="Times New Roman"/>
-                <a:cs typeface="Times New Roman"/>
-              </a:defRPr>
-            </a:pPr>
-            <a:r>
-              <a:rPr sz="900" b="0" i="0">
-                <a:solidFill>
-                  <a:srgbClr val="303A4B"/>
-                </a:solidFill>
-                <a:latin typeface="Times New Roman"/>
-                <a:ea typeface="Times New Roman"/>
-                <a:cs typeface="Times New Roman"/>
-              </a:rPr>
-              <a:t>identify cause and confidence</a:t>
-            </a:r>
-          </a:p>
-        </p:txBody>
-      </p:sp>
-      <p:cxnSp>
-        <p:nvCxnSpPr>
-          <p:cNvPr id="36" name=""/>
-          <p:cNvCxnSpPr>
-            <a:stCxn xmlns:a="http://schemas.openxmlformats.org/drawingml/2006/main" id="3" idx="3"/>
-            <a:endCxn xmlns:a="http://schemas.openxmlformats.org/drawingml/2006/main" id="6" idx="1"/>
-          </p:cNvCxnSpPr>
-          <p:nvPr/>
-        </p:nvCxnSpPr>
-        <p:spPr>
-          <a:xfrm xmlns:a="http://schemas.openxmlformats.org/drawingml/2006/main">
-            <a:off x="2857500" y="3024188"/>
-            <a:ext cx="476250" cy="0"/>
-          </a:xfrm>
-          <a:prstGeom xmlns:a="http://schemas.openxmlformats.org/drawingml/2006/main" prst="straightConnector1">
-            <a:avLst/>
-          </a:prstGeom>
-          <a:ln xmlns:a="http://schemas.openxmlformats.org/drawingml/2006/main" w="19050">
-            <a:solidFill>
-              <a:srgbClr val="438B86"/>
+            <a:ln xmlns:a="http://schemas.openxmlformats.org/drawingml/2006/main" w="13335">
+              <a:solidFill>
+                <a:srgbClr val="B86659"/>
+              </a:solidFill>
+              <a:prstDash val="solid"/>
+            </a:ln>
+          </p:spPr>
+        </p:sp>
+        <p:sp>
+          <p:nvSpPr>
+            <p:cNvPr id="11" name="">
+              <a:extLst xmlns:a="http://schemas.openxmlformats.org/drawingml/2006/main">
+                <a:ext uri="{FF2B5EF4-FFF2-40B4-BE49-F238E27FC236}">
+                  <a16:creationId xmlns:a16="http://schemas.microsoft.com/office/drawing/2014/main" id="{3C44ED09-291E-4CEF-80CE-1FEFAF7C4F45}"/>
+                </a:ext>
+              </a:extLst>
+            </p:cNvPr>
+            <p:cNvSpPr>
+              <a:spLocks xmlns:a="http://schemas.openxmlformats.org/drawingml/2006/main"/>
+            </p:cNvSpPr>
+            <p:nvPr/>
+          </p:nvSpPr>
+          <p:spPr>
+            <a:xfrm xmlns:a="http://schemas.openxmlformats.org/drawingml/2006/main">
+              <a:off x="8953500" y="2571750"/>
+              <a:ext cx="2095500" cy="266700"/>
+            </a:xfrm>
+            <a:prstGeom xmlns:a="http://schemas.openxmlformats.org/drawingml/2006/main" prst="rect">
+              <a:avLst/>
+            </a:prstGeom>
+            <a:noFill xmlns:a="http://schemas.openxmlformats.org/drawingml/2006/main"/>
+            <a:ln xmlns:a="http://schemas.openxmlformats.org/drawingml/2006/main" w="0">
+              <a:noFill/>
+              <a:prstDash val="solid"/>
+            </a:ln>
+          </p:spPr>
+          <p:txBody>
+            <a:bodyPr xmlns:a="http://schemas.openxmlformats.org/drawingml/2006/main"/>
+            <a:lstStyle xmlns:a="http://schemas.openxmlformats.org/drawingml/2006/main"/>
+            <a:p xmlns:a="http://schemas.openxmlformats.org/drawingml/2006/main">
+              <a:pPr>
+                <a:defRPr sz="1275" b="1" i="0">
+                  <a:solidFill>
+                    <a:srgbClr val="B86659"/>
+                  </a:solidFill>
+                  <a:latin typeface="Times New Roman"/>
+                  <a:ea typeface="Times New Roman"/>
+                  <a:cs typeface="Times New Roman"/>
+                </a:defRPr>
+              </a:pPr>
+              <a:r>
+                <a:rPr sz="1275" b="1" i="0">
+                  <a:solidFill>
+                    <a:srgbClr val="B86659"/>
+                  </a:solidFill>
+                  <a:latin typeface="Times New Roman"/>
+                  <a:ea typeface="Times New Roman"/>
+                  <a:cs typeface="Times New Roman"/>
+                </a:rPr>
+                <a:t>Iterative refinement</a:t>
+              </a:r>
+            </a:p>
+          </p:txBody>
+        </p:sp>
+        <p:sp>
+          <p:nvSpPr>
+            <p:cNvPr id="12" name="">
+              <a:extLst xmlns:a="http://schemas.openxmlformats.org/drawingml/2006/main">
+                <a:ext uri="{FF2B5EF4-FFF2-40B4-BE49-F238E27FC236}">
+                  <a16:creationId xmlns:a16="http://schemas.microsoft.com/office/drawing/2014/main" id="{EF429A76-4B27-43B8-A278-89A4FB920E7E}"/>
+                </a:ext>
+              </a:extLst>
+            </p:cNvPr>
+            <p:cNvSpPr>
+              <a:spLocks xmlns:a="http://schemas.openxmlformats.org/drawingml/2006/main"/>
+            </p:cNvSpPr>
+            <p:nvPr/>
+          </p:nvSpPr>
+          <p:spPr>
+            <a:xfrm xmlns:a="http://schemas.openxmlformats.org/drawingml/2006/main">
+              <a:off x="8972550" y="2876550"/>
+              <a:ext cx="2057400" cy="619125"/>
+            </a:xfrm>
+            <a:prstGeom xmlns:a="http://schemas.openxmlformats.org/drawingml/2006/main" prst="rect">
+              <a:avLst/>
+            </a:prstGeom>
+            <a:noFill xmlns:a="http://schemas.openxmlformats.org/drawingml/2006/main"/>
+            <a:ln xmlns:a="http://schemas.openxmlformats.org/drawingml/2006/main" w="0">
+              <a:noFill/>
+              <a:prstDash val="solid"/>
+            </a:ln>
+          </p:spPr>
+          <p:txBody>
+            <a:bodyPr xmlns:a="http://schemas.openxmlformats.org/drawingml/2006/main"/>
+            <a:lstStyle xmlns:a="http://schemas.openxmlformats.org/drawingml/2006/main"/>
+            <a:p xmlns:a="http://schemas.openxmlformats.org/drawingml/2006/main">
+              <a:pPr>
+                <a:defRPr sz="900" b="0" i="0">
+                  <a:solidFill>
+                    <a:srgbClr val="303A4B"/>
+                  </a:solidFill>
+                  <a:latin typeface="Times New Roman"/>
+                  <a:ea typeface="Times New Roman"/>
+                  <a:cs typeface="Times New Roman"/>
+                </a:defRPr>
+              </a:pPr>
+              <a:r>
+                <a:rPr sz="900" b="0" i="0">
+                  <a:solidFill>
+                    <a:srgbClr val="303A4B"/>
+                  </a:solidFill>
+                  <a:latin typeface="Times New Roman"/>
+                  <a:ea typeface="Times New Roman"/>
+                  <a:cs typeface="Times New Roman"/>
+                </a:rPr>
+                <a:t>refine anomaly intervals</a:t>
+              </a:r>
+            </a:p>
+          </p:txBody>
+        </p:sp>
+        <p:cxnSp>
+          <p:nvCxnSpPr>
+            <p:cNvPr id="32" name=""/>
+            <p:cNvCxnSpPr>
+              <a:stCxn xmlns:a="http://schemas.openxmlformats.org/drawingml/2006/main" id="1" idx="3"/>
+              <a:endCxn xmlns:a="http://schemas.openxmlformats.org/drawingml/2006/main" id="4" idx="1"/>
+            </p:cNvCxnSpPr>
+            <p:nvPr/>
+          </p:nvCxnSpPr>
+          <p:spPr>
+            <a:xfrm xmlns:a="http://schemas.openxmlformats.org/drawingml/2006/main">
+              <a:off x="2857500" y="3024188"/>
+              <a:ext cx="476250" cy="0"/>
+            </a:xfrm>
+            <a:prstGeom xmlns:a="http://schemas.openxmlformats.org/drawingml/2006/main" prst="straightConnector1">
+              <a:avLst/>
+            </a:prstGeom>
+            <a:ln xmlns:a="http://schemas.openxmlformats.org/drawingml/2006/main" w="19050">
+              <a:solidFill>
+                <a:srgbClr val="438B86"/>
+              </a:solidFill>
+              <a:prstDash val="solid"/>
+              <a:tailEnd type="arrow" w="sm" len="sm"/>
+            </a:ln>
+          </p:spPr>
+        </p:cxnSp>
+        <p:cxnSp>
+          <p:nvCxnSpPr>
+            <p:cNvPr id="33" name=""/>
+            <p:cNvCxnSpPr>
+              <a:stCxn xmlns:a="http://schemas.openxmlformats.org/drawingml/2006/main" id="4" idx="3"/>
+              <a:endCxn xmlns:a="http://schemas.openxmlformats.org/drawingml/2006/main" id="7" idx="1"/>
+            </p:cNvCxnSpPr>
+            <p:nvPr/>
+          </p:nvCxnSpPr>
+          <p:spPr>
+            <a:xfrm xmlns:a="http://schemas.openxmlformats.org/drawingml/2006/main">
+              <a:off x="5619750" y="3024188"/>
+              <a:ext cx="476250" cy="0"/>
+            </a:xfrm>
+            <a:prstGeom xmlns:a="http://schemas.openxmlformats.org/drawingml/2006/main" prst="straightConnector1">
+              <a:avLst/>
+            </a:prstGeom>
+            <a:ln xmlns:a="http://schemas.openxmlformats.org/drawingml/2006/main" w="19050">
+              <a:solidFill>
+                <a:srgbClr val="438B86"/>
+              </a:solidFill>
+              <a:prstDash val="solid"/>
+              <a:tailEnd type="arrow" w="sm" len="sm"/>
+            </a:ln>
+          </p:spPr>
+        </p:cxnSp>
+        <p:cxnSp>
+          <p:nvCxnSpPr>
+            <p:cNvPr id="34" name=""/>
+            <p:cNvCxnSpPr>
+              <a:stCxn xmlns:a="http://schemas.openxmlformats.org/drawingml/2006/main" id="7" idx="3"/>
+              <a:endCxn xmlns:a="http://schemas.openxmlformats.org/drawingml/2006/main" id="10" idx="1"/>
+            </p:cNvCxnSpPr>
+            <p:nvPr/>
+          </p:nvCxnSpPr>
+          <p:spPr>
+            <a:xfrm xmlns:a="http://schemas.openxmlformats.org/drawingml/2006/main">
+              <a:off x="8382000" y="3024188"/>
+              <a:ext cx="476250" cy="0"/>
+            </a:xfrm>
+            <a:prstGeom xmlns:a="http://schemas.openxmlformats.org/drawingml/2006/main" prst="straightConnector1">
+              <a:avLst/>
+            </a:prstGeom>
+            <a:ln xmlns:a="http://schemas.openxmlformats.org/drawingml/2006/main" w="19050">
+              <a:solidFill>
+                <a:srgbClr val="B77F2B"/>
+              </a:solidFill>
+              <a:prstDash val="solid"/>
+              <a:tailEnd type="arrow" w="sm" len="sm"/>
+            </a:ln>
+          </p:spPr>
+        </p:cxnSp>
+        <p:sp>
+          <p:nvSpPr>
+            <p:cNvPr id="16" name="">
+              <a:extLst xmlns:a="http://schemas.openxmlformats.org/drawingml/2006/main">
+                <a:ext uri="{FF2B5EF4-FFF2-40B4-BE49-F238E27FC236}">
+                  <a16:creationId xmlns:a16="http://schemas.microsoft.com/office/drawing/2014/main" id="{F2541FA1-FA0D-45A2-8399-FDD39A399923}"/>
+                </a:ext>
+              </a:extLst>
+            </p:cNvPr>
+            <p:cNvSpPr>
+              <a:spLocks xmlns:a="http://schemas.openxmlformats.org/drawingml/2006/main"/>
+            </p:cNvSpPr>
+            <p:nvPr/>
+          </p:nvSpPr>
+          <p:spPr>
+            <a:xfrm xmlns:a="http://schemas.openxmlformats.org/drawingml/2006/main">
+              <a:off x="1238250" y="1428750"/>
+              <a:ext cx="9715500" cy="571500"/>
+            </a:xfrm>
+            <a:prstGeom xmlns:a="http://schemas.openxmlformats.org/drawingml/2006/main" prst="roundRect">
+              <a:avLst>
+                <a:gd name="adj" fmla="val 13333"/>
+              </a:avLst>
+            </a:prstGeom>
+            <a:solidFill xmlns:a="http://schemas.openxmlformats.org/drawingml/2006/main">
+              <a:srgbClr val="E6E0F2"/>
             </a:solidFill>
-            <a:prstDash val="solid"/>
-            <a:headEnd type="arrow" w="sm" len="sm"/>
-          </a:ln>
-        </p:spPr>
-      </p:cxnSp>
-      <p:cxnSp>
-        <p:nvCxnSpPr>
-          <p:cNvPr id="37" name=""/>
-          <p:cNvCxnSpPr>
-            <a:stCxn xmlns:a="http://schemas.openxmlformats.org/drawingml/2006/main" id="6" idx="3"/>
-            <a:endCxn xmlns:a="http://schemas.openxmlformats.org/drawingml/2006/main" id="9" idx="1"/>
-          </p:cNvCxnSpPr>
-          <p:nvPr/>
-        </p:nvCxnSpPr>
-        <p:spPr>
-          <a:xfrm xmlns:a="http://schemas.openxmlformats.org/drawingml/2006/main">
-            <a:off x="5619750" y="3024188"/>
-            <a:ext cx="476250" cy="0"/>
-          </a:xfrm>
-          <a:prstGeom xmlns:a="http://schemas.openxmlformats.org/drawingml/2006/main" prst="straightConnector1">
-            <a:avLst/>
-          </a:prstGeom>
-          <a:ln xmlns:a="http://schemas.openxmlformats.org/drawingml/2006/main" w="19050">
-            <a:solidFill>
-              <a:srgbClr val="438B86"/>
+            <a:ln xmlns:a="http://schemas.openxmlformats.org/drawingml/2006/main" w="11430">
+              <a:solidFill>
+                <a:srgbClr val="78639F"/>
+              </a:solidFill>
+              <a:prstDash val="dash"/>
+            </a:ln>
+          </p:spPr>
+        </p:sp>
+        <p:sp>
+          <p:nvSpPr>
+            <p:cNvPr id="17" name="">
+              <a:extLst xmlns:a="http://schemas.openxmlformats.org/drawingml/2006/main">
+                <a:ext uri="{FF2B5EF4-FFF2-40B4-BE49-F238E27FC236}">
+                  <a16:creationId xmlns:a16="http://schemas.microsoft.com/office/drawing/2014/main" id="{9AC80899-19F7-46D4-BA3A-2450ABF92BC7}"/>
+                </a:ext>
+              </a:extLst>
+            </p:cNvPr>
+            <p:cNvSpPr>
+              <a:spLocks xmlns:a="http://schemas.openxmlformats.org/drawingml/2006/main"/>
+            </p:cNvSpPr>
+            <p:nvPr/>
+          </p:nvSpPr>
+          <p:spPr>
+            <a:xfrm xmlns:a="http://schemas.openxmlformats.org/drawingml/2006/main">
+              <a:off x="1428750" y="1543050"/>
+              <a:ext cx="9334500" cy="285750"/>
+            </a:xfrm>
+            <a:prstGeom xmlns:a="http://schemas.openxmlformats.org/drawingml/2006/main" prst="rect">
+              <a:avLst/>
+            </a:prstGeom>
+            <a:noFill xmlns:a="http://schemas.openxmlformats.org/drawingml/2006/main"/>
+            <a:ln xmlns:a="http://schemas.openxmlformats.org/drawingml/2006/main" w="0">
+              <a:noFill/>
+              <a:prstDash val="solid"/>
+            </a:ln>
+          </p:spPr>
+          <p:txBody>
+            <a:bodyPr xmlns:a="http://schemas.openxmlformats.org/drawingml/2006/main"/>
+            <a:lstStyle xmlns:a="http://schemas.openxmlformats.org/drawingml/2006/main"/>
+            <a:p xmlns:a="http://schemas.openxmlformats.org/drawingml/2006/main">
+              <a:pPr>
+                <a:defRPr sz="1200" b="1" i="0">
+                  <a:solidFill>
+                    <a:srgbClr val="78639F"/>
+                  </a:solidFill>
+                  <a:latin typeface="Times New Roman"/>
+                  <a:ea typeface="Times New Roman"/>
+                  <a:cs typeface="Times New Roman"/>
+                </a:defRPr>
+              </a:pPr>
+              <a:r>
+                <a:rPr sz="1200" b="1" i="0">
+                  <a:solidFill>
+                    <a:srgbClr val="78639F"/>
+                  </a:solidFill>
+                  <a:latin typeface="Times New Roman"/>
+                  <a:ea typeface="Times New Roman"/>
+                  <a:cs typeface="Times New Roman"/>
+                </a:rPr>
+                <a:t>Detector training with rule-based rewards</a:t>
+              </a:r>
+            </a:p>
+          </p:txBody>
+        </p:sp>
+        <p:sp>
+          <p:nvSpPr>
+            <p:cNvPr id="18" name="">
+              <a:extLst xmlns:a="http://schemas.openxmlformats.org/drawingml/2006/main">
+                <a:ext uri="{FF2B5EF4-FFF2-40B4-BE49-F238E27FC236}">
+                  <a16:creationId xmlns:a16="http://schemas.microsoft.com/office/drawing/2014/main" id="{B4E583EF-1057-44B0-8634-1631416F13EE}"/>
+                </a:ext>
+              </a:extLst>
+            </p:cNvPr>
+            <p:cNvSpPr>
+              <a:spLocks xmlns:a="http://schemas.openxmlformats.org/drawingml/2006/main"/>
+            </p:cNvSpPr>
+            <p:nvPr/>
+          </p:nvSpPr>
+          <p:spPr>
+            <a:xfrm xmlns:a="http://schemas.openxmlformats.org/drawingml/2006/main">
+              <a:off x="1619250" y="4333875"/>
+              <a:ext cx="8572500" cy="666750"/>
+            </a:xfrm>
+            <a:prstGeom xmlns:a="http://schemas.openxmlformats.org/drawingml/2006/main" prst="roundRect">
+              <a:avLst>
+                <a:gd name="adj" fmla="val 11429"/>
+              </a:avLst>
+            </a:prstGeom>
+            <a:solidFill xmlns:a="http://schemas.openxmlformats.org/drawingml/2006/main">
+              <a:srgbClr val="FFFFFF"/>
             </a:solidFill>
-            <a:prstDash val="solid"/>
-            <a:headEnd type="arrow" w="sm" len="sm"/>
-          </a:ln>
-        </p:spPr>
-      </p:cxnSp>
-      <p:cxnSp>
-        <p:nvCxnSpPr>
-          <p:cNvPr id="38" name=""/>
-          <p:cNvCxnSpPr>
-            <a:stCxn xmlns:a="http://schemas.openxmlformats.org/drawingml/2006/main" id="9" idx="3"/>
-            <a:endCxn xmlns:a="http://schemas.openxmlformats.org/drawingml/2006/main" id="12" idx="1"/>
-          </p:cNvCxnSpPr>
-          <p:nvPr/>
-        </p:nvCxnSpPr>
-        <p:spPr>
-          <a:xfrm xmlns:a="http://schemas.openxmlformats.org/drawingml/2006/main">
-            <a:off x="8382000" y="3024188"/>
-            <a:ext cx="476250" cy="0"/>
-          </a:xfrm>
-          <a:prstGeom xmlns:a="http://schemas.openxmlformats.org/drawingml/2006/main" prst="straightConnector1">
-            <a:avLst/>
-          </a:prstGeom>
-          <a:ln xmlns:a="http://schemas.openxmlformats.org/drawingml/2006/main" w="19050">
-            <a:solidFill>
-              <a:srgbClr val="B77F2B"/>
-            </a:solidFill>
-            <a:prstDash val="solid"/>
-            <a:headEnd type="arrow" w="sm" len="sm"/>
-          </a:ln>
-        </p:spPr>
-      </p:cxnSp>
-      <p:sp>
-        <p:nvSpPr>
-          <p:cNvPr id="18" name="">
-            <a:extLst xmlns:a="http://schemas.openxmlformats.org/drawingml/2006/main">
-              <a:ext uri="{FF2B5EF4-FFF2-40B4-BE49-F238E27FC236}">
-                <a16:creationId xmlns:a16="http://schemas.microsoft.com/office/drawing/2014/main" id="{5E1C884F-607C-4037-AC69-D0F07BFFAFE6}"/>
-              </a:ext>
-            </a:extLst>
-          </p:cNvPr>
-          <p:cNvSpPr>
-            <a:spLocks xmlns:a="http://schemas.openxmlformats.org/drawingml/2006/main" noGrp="1"/>
-          </p:cNvSpPr>
-          <p:nvPr/>
-        </p:nvSpPr>
-        <p:spPr>
-          <a:xfrm xmlns:a="http://schemas.openxmlformats.org/drawingml/2006/main">
-            <a:off x="1238250" y="1428750"/>
-            <a:ext cx="9715500" cy="571500"/>
-          </a:xfrm>
-          <a:prstGeom xmlns:a="http://schemas.openxmlformats.org/drawingml/2006/main" prst="roundRect">
-            <a:avLst>
-              <a:gd name="adj" fmla="val 13333"/>
-            </a:avLst>
-          </a:prstGeom>
-          <a:solidFill xmlns:a="http://schemas.openxmlformats.org/drawingml/2006/main">
-            <a:srgbClr val="E6E0F2"/>
-          </a:solidFill>
-          <a:ln xmlns:a="http://schemas.openxmlformats.org/drawingml/2006/main" w="11430">
-            <a:solidFill>
-              <a:srgbClr val="78639F"/>
-            </a:solidFill>
-            <a:prstDash val="dash"/>
-          </a:ln>
-        </p:spPr>
-      </p:sp>
-      <p:sp>
-        <p:nvSpPr>
-          <p:cNvPr id="19" name="">
-            <a:extLst xmlns:a="http://schemas.openxmlformats.org/drawingml/2006/main">
-              <a:ext uri="{FF2B5EF4-FFF2-40B4-BE49-F238E27FC236}">
-                <a16:creationId xmlns:a16="http://schemas.microsoft.com/office/drawing/2014/main" id="{57394A6E-ABF2-424C-ABF5-BE7326265315}"/>
-              </a:ext>
-            </a:extLst>
-          </p:cNvPr>
-          <p:cNvSpPr>
-            <a:spLocks xmlns:a="http://schemas.openxmlformats.org/drawingml/2006/main" noGrp="1"/>
-          </p:cNvSpPr>
-          <p:nvPr/>
-        </p:nvSpPr>
-        <p:spPr>
-          <a:xfrm xmlns:a="http://schemas.openxmlformats.org/drawingml/2006/main">
-            <a:off x="1428750" y="1543050"/>
-            <a:ext cx="9334500" cy="285750"/>
-          </a:xfrm>
-          <a:prstGeom xmlns:a="http://schemas.openxmlformats.org/drawingml/2006/main" prst="rect">
-            <a:avLst/>
-          </a:prstGeom>
-          <a:noFill xmlns:a="http://schemas.openxmlformats.org/drawingml/2006/main"/>
-          <a:ln xmlns:a="http://schemas.openxmlformats.org/drawingml/2006/main" w="0">
-            <a:noFill/>
-            <a:prstDash val="solid"/>
-          </a:ln>
-        </p:spPr>
-        <p:txBody>
-          <a:bodyPr xmlns:a="http://schemas.openxmlformats.org/drawingml/2006/main"/>
-          <a:lstStyle xmlns:a="http://schemas.openxmlformats.org/drawingml/2006/main"/>
-          <a:p xmlns:a="http://schemas.openxmlformats.org/drawingml/2006/main">
-            <a:pPr>
-              <a:defRPr sz="1200" b="1" i="0">
-                <a:solidFill>
-                  <a:srgbClr val="78639F"/>
-                </a:solidFill>
-                <a:latin typeface="Times New Roman"/>
-                <a:ea typeface="Times New Roman"/>
-                <a:cs typeface="Times New Roman"/>
-              </a:defRPr>
-            </a:pPr>
-            <a:r>
-              <a:rPr sz="1200" b="1" i="0">
-                <a:solidFill>
-                  <a:srgbClr val="78639F"/>
-                </a:solidFill>
-                <a:latin typeface="Times New Roman"/>
-                <a:ea typeface="Times New Roman"/>
-                <a:cs typeface="Times New Roman"/>
-              </a:rPr>
-              <a:t>training and feedback update the detector, diagnostic tools, and review policy</a:t>
-            </a:r>
-          </a:p>
-        </p:txBody>
-      </p:sp>
-      <p:sp>
-        <p:nvSpPr>
-          <p:cNvPr id="20" name="">
-            <a:extLst xmlns:a="http://schemas.openxmlformats.org/drawingml/2006/main">
-              <a:ext uri="{FF2B5EF4-FFF2-40B4-BE49-F238E27FC236}">
-                <a16:creationId xmlns:a16="http://schemas.microsoft.com/office/drawing/2014/main" id="{398109DF-428A-4E7F-986E-C00E3605E2FE}"/>
-              </a:ext>
-            </a:extLst>
-          </p:cNvPr>
-          <p:cNvSpPr>
-            <a:spLocks xmlns:a="http://schemas.openxmlformats.org/drawingml/2006/main" noGrp="1"/>
-          </p:cNvSpPr>
-          <p:nvPr/>
-        </p:nvSpPr>
-        <p:spPr>
-          <a:xfrm xmlns:a="http://schemas.openxmlformats.org/drawingml/2006/main">
-            <a:off x="1619250" y="4333875"/>
-            <a:ext cx="8572500" cy="666750"/>
-          </a:xfrm>
-          <a:prstGeom xmlns:a="http://schemas.openxmlformats.org/drawingml/2006/main" prst="roundRect">
-            <a:avLst>
-              <a:gd name="adj" fmla="val 11429"/>
-            </a:avLst>
-          </a:prstGeom>
-          <a:solidFill xmlns:a="http://schemas.openxmlformats.org/drawingml/2006/main">
-            <a:srgbClr val="FFFFFF"/>
-          </a:solidFill>
-          <a:ln xmlns:a="http://schemas.openxmlformats.org/drawingml/2006/main" w="12383">
-            <a:solidFill>
-              <a:srgbClr val="24324A"/>
-            </a:solidFill>
-            <a:prstDash val="solid"/>
-          </a:ln>
-        </p:spPr>
-      </p:sp>
-      <p:sp>
-        <p:nvSpPr>
-          <p:cNvPr id="21" name="">
-            <a:extLst xmlns:a="http://schemas.openxmlformats.org/drawingml/2006/main">
-              <a:ext uri="{FF2B5EF4-FFF2-40B4-BE49-F238E27FC236}">
-                <a16:creationId xmlns:a16="http://schemas.microsoft.com/office/drawing/2014/main" id="{026714D6-96D0-4861-89A8-AF1ED7792FAD}"/>
-              </a:ext>
-            </a:extLst>
-          </p:cNvPr>
-          <p:cNvSpPr>
-            <a:spLocks xmlns:a="http://schemas.openxmlformats.org/drawingml/2006/main" noGrp="1"/>
-          </p:cNvSpPr>
-          <p:nvPr/>
-        </p:nvSpPr>
-        <p:spPr>
-          <a:xfrm xmlns:a="http://schemas.openxmlformats.org/drawingml/2006/main">
-            <a:off x="1857375" y="4476750"/>
-            <a:ext cx="8096250" cy="238125"/>
-          </a:xfrm>
-          <a:prstGeom xmlns:a="http://schemas.openxmlformats.org/drawingml/2006/main" prst="rect">
-            <a:avLst/>
-          </a:prstGeom>
-          <a:noFill xmlns:a="http://schemas.openxmlformats.org/drawingml/2006/main"/>
-          <a:ln xmlns:a="http://schemas.openxmlformats.org/drawingml/2006/main" w="0">
-            <a:noFill/>
-            <a:prstDash val="solid"/>
-          </a:ln>
-        </p:spPr>
-        <p:txBody>
-          <a:bodyPr xmlns:a="http://schemas.openxmlformats.org/drawingml/2006/main"/>
-          <a:lstStyle xmlns:a="http://schemas.openxmlformats.org/drawingml/2006/main"/>
-          <a:p xmlns:a="http://schemas.openxmlformats.org/drawingml/2006/main">
-            <a:pPr>
-              <a:defRPr sz="1050" b="1" i="0">
-                <a:solidFill>
-                  <a:srgbClr val="24324A"/>
-                </a:solidFill>
-                <a:latin typeface="Times New Roman"/>
-                <a:ea typeface="Times New Roman"/>
-                <a:cs typeface="Times New Roman"/>
-              </a:defRPr>
-            </a:pPr>
-            <a:r>
-              <a:rPr sz="1050" b="1" i="0">
-                <a:solidFill>
-                  <a:srgbClr val="24324A"/>
-                </a:solidFill>
-                <a:latin typeface="Times New Roman"/>
-                <a:ea typeface="Times New Roman"/>
-                <a:cs typeface="Times New Roman"/>
-              </a:rPr>
-              <a:t>toolkit: time-series memory · numerical diagnostics · event labels · evaluator</a:t>
-            </a:r>
-          </a:p>
-        </p:txBody>
-      </p:sp>
+            <a:ln xmlns:a="http://schemas.openxmlformats.org/drawingml/2006/main" w="12383">
+              <a:solidFill>
+                <a:srgbClr val="24324A"/>
+              </a:solidFill>
+              <a:prstDash val="solid"/>
+            </a:ln>
+          </p:spPr>
+        </p:sp>
+        <p:sp>
+          <p:nvSpPr>
+            <p:cNvPr id="19" name="">
+              <a:extLst xmlns:a="http://schemas.openxmlformats.org/drawingml/2006/main">
+                <a:ext uri="{FF2B5EF4-FFF2-40B4-BE49-F238E27FC236}">
+                  <a16:creationId xmlns:a16="http://schemas.microsoft.com/office/drawing/2014/main" id="{83B8AADD-668D-47DB-A0DD-910EFBCC89C9}"/>
+                </a:ext>
+              </a:extLst>
+            </p:cNvPr>
+            <p:cNvSpPr>
+              <a:spLocks xmlns:a="http://schemas.openxmlformats.org/drawingml/2006/main"/>
+            </p:cNvSpPr>
+            <p:nvPr/>
+          </p:nvSpPr>
+          <p:spPr>
+            <a:xfrm xmlns:a="http://schemas.openxmlformats.org/drawingml/2006/main">
+              <a:off x="1857375" y="4476750"/>
+              <a:ext cx="8096250" cy="238125"/>
+            </a:xfrm>
+            <a:prstGeom xmlns:a="http://schemas.openxmlformats.org/drawingml/2006/main" prst="rect">
+              <a:avLst/>
+            </a:prstGeom>
+            <a:noFill xmlns:a="http://schemas.openxmlformats.org/drawingml/2006/main"/>
+            <a:ln xmlns:a="http://schemas.openxmlformats.org/drawingml/2006/main" w="0">
+              <a:noFill/>
+              <a:prstDash val="solid"/>
+            </a:ln>
+          </p:spPr>
+          <p:txBody>
+            <a:bodyPr xmlns:a="http://schemas.openxmlformats.org/drawingml/2006/main"/>
+            <a:lstStyle xmlns:a="http://schemas.openxmlformats.org/drawingml/2006/main"/>
+            <a:p xmlns:a="http://schemas.openxmlformats.org/drawingml/2006/main">
+              <a:pPr>
+                <a:defRPr sz="1050" b="1" i="0">
+                  <a:solidFill>
+                    <a:srgbClr val="24324A"/>
+                  </a:solidFill>
+                  <a:latin typeface="Times New Roman"/>
+                  <a:ea typeface="Times New Roman"/>
+                  <a:cs typeface="Times New Roman"/>
+                </a:defRPr>
+              </a:pPr>
+              <a:r>
+                <a:rPr sz="1050" b="1" i="0">
+                  <a:solidFill>
+                    <a:srgbClr val="24324A"/>
+                  </a:solidFill>
+                  <a:latin typeface="Times New Roman"/>
+                  <a:ea typeface="Times New Roman"/>
+                  <a:cs typeface="Times New Roman"/>
+                </a:rPr>
+                <a:t>Toolkit: knowledge memory and numerical diagnostics</a:t>
+              </a:r>
+            </a:p>
+          </p:txBody>
+        </p:sp>
+      </p:grpSp>
     </p:spTree>
     <p:extLst>
       <p:ext uri="{BB962C8B-B14F-4D97-AF65-F5344CB8AC3E}">
-        <p14:creationId xmlns:p14="http://schemas.microsoft.com/office/powerpoint/2010/main" val="1516098180"/>
+        <p14:creationId xmlns:p14="http://schemas.microsoft.com/office/powerpoint/2010/main" val="1626392157"/>
       </p:ext>
     </p:extLst>
   </p:cSld>
@@ -8044,7 +7866,7 @@
                 <a:ea typeface="Times New Roman"/>
                 <a:cs typeface="Times New Roman"/>
               </a:rPr>
-              <a:t>trace and artifact review</a:t>
+              <a:t>task-specific artifact checks</a:t>
             </a:r>
           </a:p>
         </p:txBody>
